--- a/public/lessons/year-6-maths/spring/week-19/use-scale-factors/teaching-powerpoint-v1.pptx
+++ b/public/lessons/year-6-maths/spring/week-19/use-scale-factors/teaching-powerpoint-v1.pptx
@@ -2,24 +2,24 @@
 <file path=ppt/presentation.xml><?xml version="1.0" encoding="utf-8"?>
 <p:presentation xmlns:p="http://schemas.openxmlformats.org/presentationml/2006/main">
   <p:sldMasterIdLst>
-    <p:sldMasterId xmlns:r="http://schemas.openxmlformats.org/officeDocument/2006/relationships" id="2147483648" r:id="Rdbc9f9c4a7d04ada"/>
+    <p:sldMasterId xmlns:r="http://schemas.openxmlformats.org/officeDocument/2006/relationships" id="2147483648" r:id="R702973b9e79948f7"/>
   </p:sldMasterIdLst>
   <p:notesMasterIdLst>
-    <p:notesMasterId xmlns:r="http://schemas.openxmlformats.org/officeDocument/2006/relationships" r:id="R1107e934255f4f28"/>
+    <p:notesMasterId xmlns:r="http://schemas.openxmlformats.org/officeDocument/2006/relationships" r:id="Rf03c411f3c7f4a0d"/>
   </p:notesMasterIdLst>
   <p:sldIdLst>
-    <p:sldId xmlns:r="http://schemas.openxmlformats.org/officeDocument/2006/relationships" id="256" r:id="R631a880e77c0480d"/>
-    <p:sldId xmlns:r="http://schemas.openxmlformats.org/officeDocument/2006/relationships" id="257" r:id="Rf55bcd1dd80940c0"/>
-    <p:sldId xmlns:r="http://schemas.openxmlformats.org/officeDocument/2006/relationships" id="258" r:id="R2543ca9f103a44eb"/>
-    <p:sldId xmlns:r="http://schemas.openxmlformats.org/officeDocument/2006/relationships" id="259" r:id="R44fef3e0c29d41c9"/>
-    <p:sldId xmlns:r="http://schemas.openxmlformats.org/officeDocument/2006/relationships" id="260" r:id="Rb530690c3b494e61"/>
-    <p:sldId xmlns:r="http://schemas.openxmlformats.org/officeDocument/2006/relationships" id="261" r:id="R2128c20ff84c4b3c"/>
-    <p:sldId xmlns:r="http://schemas.openxmlformats.org/officeDocument/2006/relationships" id="262" r:id="Rb6da2bf652264a36"/>
-    <p:sldId xmlns:r="http://schemas.openxmlformats.org/officeDocument/2006/relationships" id="263" r:id="Red3861c1c46c42d2"/>
-    <p:sldId xmlns:r="http://schemas.openxmlformats.org/officeDocument/2006/relationships" id="264" r:id="Rb5438e5fe9a64366"/>
-    <p:sldId xmlns:r="http://schemas.openxmlformats.org/officeDocument/2006/relationships" id="265" r:id="Rade5de9c4f894490"/>
-    <p:sldId xmlns:r="http://schemas.openxmlformats.org/officeDocument/2006/relationships" id="266" r:id="R0fdcea90938b4813"/>
-    <p:sldId xmlns:r="http://schemas.openxmlformats.org/officeDocument/2006/relationships" id="267" r:id="R3ffed171f3d9473b"/>
+    <p:sldId xmlns:r="http://schemas.openxmlformats.org/officeDocument/2006/relationships" id="256" r:id="Rb5493488dc094bfb"/>
+    <p:sldId xmlns:r="http://schemas.openxmlformats.org/officeDocument/2006/relationships" id="257" r:id="R99ff790a1b294392"/>
+    <p:sldId xmlns:r="http://schemas.openxmlformats.org/officeDocument/2006/relationships" id="258" r:id="Rda78c7460fd74dcc"/>
+    <p:sldId xmlns:r="http://schemas.openxmlformats.org/officeDocument/2006/relationships" id="259" r:id="R66c8f6ec2f34499d"/>
+    <p:sldId xmlns:r="http://schemas.openxmlformats.org/officeDocument/2006/relationships" id="260" r:id="R8db2d16765c74283"/>
+    <p:sldId xmlns:r="http://schemas.openxmlformats.org/officeDocument/2006/relationships" id="261" r:id="Rc4ec7171c0384e09"/>
+    <p:sldId xmlns:r="http://schemas.openxmlformats.org/officeDocument/2006/relationships" id="262" r:id="Rfbbc9a44c30f4993"/>
+    <p:sldId xmlns:r="http://schemas.openxmlformats.org/officeDocument/2006/relationships" id="263" r:id="Rda40b3c1149d47fd"/>
+    <p:sldId xmlns:r="http://schemas.openxmlformats.org/officeDocument/2006/relationships" id="264" r:id="Rde41abf3747149d2"/>
+    <p:sldId xmlns:r="http://schemas.openxmlformats.org/officeDocument/2006/relationships" id="265" r:id="R264e23b6b50d4bc2"/>
+    <p:sldId xmlns:r="http://schemas.openxmlformats.org/officeDocument/2006/relationships" id="266" r:id="R85c152132940451f"/>
+    <p:sldId xmlns:r="http://schemas.openxmlformats.org/officeDocument/2006/relationships" id="267" r:id="R10121d0b83a84ed0"/>
   </p:sldIdLst>
   <p:sldSz cx="12192000" cy="6858000"/>
   <p:notesSz cx="6858000" cy="9144000"/>
@@ -873,7 +873,7 @@
           <a:lstStyle xmlns:a="http://schemas.openxmlformats.org/drawingml/2006/main"/>
           <a:p xmlns:a="http://schemas.openxmlformats.org/drawingml/2006/main">
             <a:r>
-              <a:t>I do. Reveal the question, setup and each calculation stage one click at a time. Pupils watch before copying. Model answer: 24.5 cm.</a:t>
+              <a:t>I do. Reveal the question, then reveal each mathematical change one click at a time. Point to the numbers and operation that changed before moving to the next line. Final answer: 24.5 cm.</a:t>
             </a:r>
           </a:p>
         </p:txBody>
@@ -1291,7 +1291,7 @@
   </p:cSld>
   <p:clrMap bg1="lt1" tx1="dk1" bg2="lt2" tx2="dk2" accent1="accent1" accent2="accent2" accent3="accent3" accent4="accent4" accent5="accent5" accent6="accent6" hlink="hlink" folHlink="folHlink"/>
   <p:sldLayoutIdLst>
-    <p:sldLayoutId xmlns:r="http://schemas.openxmlformats.org/officeDocument/2006/relationships" id="2147483649" r:id="Ra541d8eb76754a7a"/>
+    <p:sldLayoutId xmlns:r="http://schemas.openxmlformats.org/officeDocument/2006/relationships" id="2147483649" r:id="R883d415f3efb42b8"/>
   </p:sldLayoutIdLst>
   <p:txStyles>
     <p:titleStyle>
@@ -1842,7 +1842,7 @@
           <p:cNvPr id="12" name="">
             <a:extLst xmlns:a="http://schemas.openxmlformats.org/drawingml/2006/main">
               <a:ext uri="{FF2B5EF4-FFF2-40B4-BE49-F238E27FC236}">
-                <a16:creationId xmlns:a16="http://schemas.microsoft.com/office/drawing/2014/main" id="{C8ED5529-5FE8-416C-AE89-FFC0405B0CCC}"/>
+                <a16:creationId xmlns:a16="http://schemas.microsoft.com/office/drawing/2014/main" id="{ED3E62C9-0781-4795-9868-6619B4ED0126}"/>
               </a:ext>
             </a:extLst>
           </p:cNvPr>
@@ -1874,7 +1874,7 @@
           <p:cNvPr id="2" name="">
             <a:extLst xmlns:a="http://schemas.openxmlformats.org/drawingml/2006/main">
               <a:ext uri="{FF2B5EF4-FFF2-40B4-BE49-F238E27FC236}">
-                <a16:creationId xmlns:a16="http://schemas.microsoft.com/office/drawing/2014/main" id="{BA0BDD29-BCBA-4B9E-AACF-B1B2D5ED3A72}"/>
+                <a16:creationId xmlns:a16="http://schemas.microsoft.com/office/drawing/2014/main" id="{D24272BE-B99B-4B49-B6DA-E124DD13B9AB}"/>
               </a:ext>
             </a:extLst>
           </p:cNvPr>
@@ -1931,7 +1931,7 @@
           <p:cNvPr id="3" name="">
             <a:extLst xmlns:a="http://schemas.openxmlformats.org/drawingml/2006/main">
               <a:ext uri="{FF2B5EF4-FFF2-40B4-BE49-F238E27FC236}">
-                <a16:creationId xmlns:a16="http://schemas.microsoft.com/office/drawing/2014/main" id="{FDD77D2E-4A67-4DD7-AC50-D69D5348EDF4}"/>
+                <a16:creationId xmlns:a16="http://schemas.microsoft.com/office/drawing/2014/main" id="{619E80D1-ADAD-4902-B8F9-DB54AB58593B}"/>
               </a:ext>
             </a:extLst>
           </p:cNvPr>
@@ -1965,7 +1965,7 @@
           <p:cNvPr id="4" name="">
             <a:extLst xmlns:a="http://schemas.openxmlformats.org/drawingml/2006/main">
               <a:ext uri="{FF2B5EF4-FFF2-40B4-BE49-F238E27FC236}">
-                <a16:creationId xmlns:a16="http://schemas.microsoft.com/office/drawing/2014/main" id="{B5D8A767-FF8F-4C15-8697-43B2D0D325A1}"/>
+                <a16:creationId xmlns:a16="http://schemas.microsoft.com/office/drawing/2014/main" id="{BFB1969C-34E9-42F6-8D87-8F12D36F1877}"/>
               </a:ext>
             </a:extLst>
           </p:cNvPr>
@@ -2022,7 +2022,7 @@
           <p:cNvPr id="5" name="">
             <a:extLst xmlns:a="http://schemas.openxmlformats.org/drawingml/2006/main">
               <a:ext uri="{FF2B5EF4-FFF2-40B4-BE49-F238E27FC236}">
-                <a16:creationId xmlns:a16="http://schemas.microsoft.com/office/drawing/2014/main" id="{A14E2799-805F-4455-9627-B827CF59D21A}"/>
+                <a16:creationId xmlns:a16="http://schemas.microsoft.com/office/drawing/2014/main" id="{8C48575A-1094-4856-A83B-E91B861B123D}"/>
               </a:ext>
             </a:extLst>
           </p:cNvPr>
@@ -2079,7 +2079,7 @@
           <p:cNvPr id="6" name="">
             <a:extLst xmlns:a="http://schemas.openxmlformats.org/drawingml/2006/main">
               <a:ext uri="{FF2B5EF4-FFF2-40B4-BE49-F238E27FC236}">
-                <a16:creationId xmlns:a16="http://schemas.microsoft.com/office/drawing/2014/main" id="{9AB45B27-BB3E-4520-8844-02137737AE2F}"/>
+                <a16:creationId xmlns:a16="http://schemas.microsoft.com/office/drawing/2014/main" id="{7FCE9D4A-AA21-48D7-8DDD-56D14689CE16}"/>
               </a:ext>
             </a:extLst>
           </p:cNvPr>
@@ -2113,7 +2113,7 @@
           <p:cNvPr id="7" name="">
             <a:extLst xmlns:a="http://schemas.openxmlformats.org/drawingml/2006/main">
               <a:ext uri="{FF2B5EF4-FFF2-40B4-BE49-F238E27FC236}">
-                <a16:creationId xmlns:a16="http://schemas.microsoft.com/office/drawing/2014/main" id="{36CDCAD6-E037-46BB-9B09-002FBFB0A865}"/>
+                <a16:creationId xmlns:a16="http://schemas.microsoft.com/office/drawing/2014/main" id="{95905F47-CC4D-418E-8D10-9DEC1D6D2160}"/>
               </a:ext>
             </a:extLst>
           </p:cNvPr>
@@ -2170,7 +2170,7 @@
           <p:cNvPr id="8" name="">
             <a:extLst xmlns:a="http://schemas.openxmlformats.org/drawingml/2006/main">
               <a:ext uri="{FF2B5EF4-FFF2-40B4-BE49-F238E27FC236}">
-                <a16:creationId xmlns:a16="http://schemas.microsoft.com/office/drawing/2014/main" id="{AA9AD561-BC9B-461A-9F0D-8F083E983557}"/>
+                <a16:creationId xmlns:a16="http://schemas.microsoft.com/office/drawing/2014/main" id="{10139760-636F-4D70-8CD3-4726405F7FE2}"/>
               </a:ext>
             </a:extLst>
           </p:cNvPr>
@@ -2227,7 +2227,7 @@
           <p:cNvPr id="9" name="">
             <a:extLst xmlns:a="http://schemas.openxmlformats.org/drawingml/2006/main">
               <a:ext uri="{FF2B5EF4-FFF2-40B4-BE49-F238E27FC236}">
-                <a16:creationId xmlns:a16="http://schemas.microsoft.com/office/drawing/2014/main" id="{45DBC1D2-A393-449D-B4B1-B23C84830598}"/>
+                <a16:creationId xmlns:a16="http://schemas.microsoft.com/office/drawing/2014/main" id="{CA86A315-35C3-4ABA-BFC1-E84F3BE0AE2C}"/>
               </a:ext>
             </a:extLst>
           </p:cNvPr>
@@ -2284,7 +2284,7 @@
           <p:cNvPr id="10" name="">
             <a:extLst xmlns:a="http://schemas.openxmlformats.org/drawingml/2006/main">
               <a:ext uri="{FF2B5EF4-FFF2-40B4-BE49-F238E27FC236}">
-                <a16:creationId xmlns:a16="http://schemas.microsoft.com/office/drawing/2014/main" id="{2C2287DB-14C1-4445-A645-D7A1EAE067F9}"/>
+                <a16:creationId xmlns:a16="http://schemas.microsoft.com/office/drawing/2014/main" id="{A87DEB00-E81E-4D97-8C0F-EE9181250A40}"/>
               </a:ext>
             </a:extLst>
           </p:cNvPr>
@@ -2341,7 +2341,7 @@
           <p:cNvPr id="11" name="">
             <a:extLst xmlns:a="http://schemas.openxmlformats.org/drawingml/2006/main">
               <a:ext uri="{FF2B5EF4-FFF2-40B4-BE49-F238E27FC236}">
-                <a16:creationId xmlns:a16="http://schemas.microsoft.com/office/drawing/2014/main" id="{1C62FA57-7921-4779-A3F1-149149B69814}"/>
+                <a16:creationId xmlns:a16="http://schemas.microsoft.com/office/drawing/2014/main" id="{7176BC26-5FFF-4A37-9A9B-101DA491CFCF}"/>
               </a:ext>
             </a:extLst>
           </p:cNvPr>
@@ -2396,7 +2396,7 @@
     </p:spTree>
     <p:extLst>
       <p:ext uri="{BB962C8B-B14F-4D97-AF65-F5344CB8AC3E}">
-        <p14:creationId xmlns:p14="http://schemas.microsoft.com/office/powerpoint/2010/main" val="703612859"/>
+        <p14:creationId xmlns:p14="http://schemas.microsoft.com/office/powerpoint/2010/main" val="726846577"/>
       </p:ext>
     </p:extLst>
   </p:cSld>
@@ -2427,7 +2427,7 @@
           <p:cNvPr id="14" name="">
             <a:extLst xmlns:a="http://schemas.openxmlformats.org/drawingml/2006/main">
               <a:ext uri="{FF2B5EF4-FFF2-40B4-BE49-F238E27FC236}">
-                <a16:creationId xmlns:a16="http://schemas.microsoft.com/office/drawing/2014/main" id="{F9F675DD-5E0F-4467-800E-D0564E0C7AA5}"/>
+                <a16:creationId xmlns:a16="http://schemas.microsoft.com/office/drawing/2014/main" id="{5B33BDFF-F4D7-4925-ACC1-62C86FA3924A}"/>
               </a:ext>
             </a:extLst>
           </p:cNvPr>
@@ -2459,7 +2459,7 @@
           <p:cNvPr id="2" name="">
             <a:extLst xmlns:a="http://schemas.openxmlformats.org/drawingml/2006/main">
               <a:ext uri="{FF2B5EF4-FFF2-40B4-BE49-F238E27FC236}">
-                <a16:creationId xmlns:a16="http://schemas.microsoft.com/office/drawing/2014/main" id="{4096CBC5-7EBE-4D14-BF71-C7EA6BA0D6E2}"/>
+                <a16:creationId xmlns:a16="http://schemas.microsoft.com/office/drawing/2014/main" id="{AD79AFFF-F3B0-4FEC-BA4D-50094EC8F8DB}"/>
               </a:ext>
             </a:extLst>
           </p:cNvPr>
@@ -2516,7 +2516,7 @@
           <p:cNvPr id="3" name="">
             <a:extLst xmlns:a="http://schemas.openxmlformats.org/drawingml/2006/main">
               <a:ext uri="{FF2B5EF4-FFF2-40B4-BE49-F238E27FC236}">
-                <a16:creationId xmlns:a16="http://schemas.microsoft.com/office/drawing/2014/main" id="{BCAFF476-FAFD-4AA2-9623-2EFB634E9499}"/>
+                <a16:creationId xmlns:a16="http://schemas.microsoft.com/office/drawing/2014/main" id="{106D0DEE-DC9F-465F-A78A-94CF5002601D}"/>
               </a:ext>
             </a:extLst>
           </p:cNvPr>
@@ -2548,7 +2548,7 @@
           <p:cNvPr id="4" name="">
             <a:extLst xmlns:a="http://schemas.openxmlformats.org/drawingml/2006/main">
               <a:ext uri="{FF2B5EF4-FFF2-40B4-BE49-F238E27FC236}">
-                <a16:creationId xmlns:a16="http://schemas.microsoft.com/office/drawing/2014/main" id="{DC8EDC9F-73B2-4F2C-81BB-31AEBEA0E10A}"/>
+                <a16:creationId xmlns:a16="http://schemas.microsoft.com/office/drawing/2014/main" id="{75AADC83-84B0-4A41-99EB-F247F5AA76D0}"/>
               </a:ext>
             </a:extLst>
           </p:cNvPr>
@@ -2605,7 +2605,7 @@
           <p:cNvPr id="5" name="">
             <a:extLst xmlns:a="http://schemas.openxmlformats.org/drawingml/2006/main">
               <a:ext uri="{FF2B5EF4-FFF2-40B4-BE49-F238E27FC236}">
-                <a16:creationId xmlns:a16="http://schemas.microsoft.com/office/drawing/2014/main" id="{79FD4706-155B-4BFB-8CB4-C8B7ED5841DE}"/>
+                <a16:creationId xmlns:a16="http://schemas.microsoft.com/office/drawing/2014/main" id="{B0BC939F-ADB0-4901-B6DD-283E2A3062C1}"/>
               </a:ext>
             </a:extLst>
           </p:cNvPr>
@@ -2662,7 +2662,7 @@
           <p:cNvPr id="6" name="">
             <a:extLst xmlns:a="http://schemas.openxmlformats.org/drawingml/2006/main">
               <a:ext uri="{FF2B5EF4-FFF2-40B4-BE49-F238E27FC236}">
-                <a16:creationId xmlns:a16="http://schemas.microsoft.com/office/drawing/2014/main" id="{0FADA9EC-671A-449E-93C7-0469AF0875A2}"/>
+                <a16:creationId xmlns:a16="http://schemas.microsoft.com/office/drawing/2014/main" id="{A7A242E0-3326-4A41-9C5A-BD1877C2D994}"/>
               </a:ext>
             </a:extLst>
           </p:cNvPr>
@@ -2719,7 +2719,7 @@
           <p:cNvPr id="7" name="">
             <a:extLst xmlns:a="http://schemas.openxmlformats.org/drawingml/2006/main">
               <a:ext uri="{FF2B5EF4-FFF2-40B4-BE49-F238E27FC236}">
-                <a16:creationId xmlns:a16="http://schemas.microsoft.com/office/drawing/2014/main" id="{EFFF2C0E-161A-46EB-B21F-081FD6D5C4AC}"/>
+                <a16:creationId xmlns:a16="http://schemas.microsoft.com/office/drawing/2014/main" id="{A9C496C7-7343-4C85-AC81-3971D3071F1B}"/>
               </a:ext>
             </a:extLst>
           </p:cNvPr>
@@ -2751,7 +2751,7 @@
           <p:cNvPr id="8" name="">
             <a:extLst xmlns:a="http://schemas.openxmlformats.org/drawingml/2006/main">
               <a:ext uri="{FF2B5EF4-FFF2-40B4-BE49-F238E27FC236}">
-                <a16:creationId xmlns:a16="http://schemas.microsoft.com/office/drawing/2014/main" id="{97F5D4DF-E6C2-4218-BC5D-1ED0266EC8A9}"/>
+                <a16:creationId xmlns:a16="http://schemas.microsoft.com/office/drawing/2014/main" id="{2D75B8FE-ECC1-4EF8-8FBE-E20A951BCC1A}"/>
               </a:ext>
             </a:extLst>
           </p:cNvPr>
@@ -2808,7 +2808,7 @@
           <p:cNvPr id="9" name="">
             <a:extLst xmlns:a="http://schemas.openxmlformats.org/drawingml/2006/main">
               <a:ext uri="{FF2B5EF4-FFF2-40B4-BE49-F238E27FC236}">
-                <a16:creationId xmlns:a16="http://schemas.microsoft.com/office/drawing/2014/main" id="{AF90754A-BEB7-4F26-A2DA-7B31589DFDE5}"/>
+                <a16:creationId xmlns:a16="http://schemas.microsoft.com/office/drawing/2014/main" id="{140A6AA1-C212-406C-8AE5-992C114FE99A}"/>
               </a:ext>
             </a:extLst>
           </p:cNvPr>
@@ -2865,7 +2865,7 @@
           <p:cNvPr id="10" name="">
             <a:extLst xmlns:a="http://schemas.openxmlformats.org/drawingml/2006/main">
               <a:ext uri="{FF2B5EF4-FFF2-40B4-BE49-F238E27FC236}">
-                <a16:creationId xmlns:a16="http://schemas.microsoft.com/office/drawing/2014/main" id="{810EA769-315F-420F-9592-E138FA2948C7}"/>
+                <a16:creationId xmlns:a16="http://schemas.microsoft.com/office/drawing/2014/main" id="{491F4B14-A8C0-4C43-9AEC-165B3AED334D}"/>
               </a:ext>
             </a:extLst>
           </p:cNvPr>
@@ -2922,7 +2922,7 @@
           <p:cNvPr id="11" name="">
             <a:extLst xmlns:a="http://schemas.openxmlformats.org/drawingml/2006/main">
               <a:ext uri="{FF2B5EF4-FFF2-40B4-BE49-F238E27FC236}">
-                <a16:creationId xmlns:a16="http://schemas.microsoft.com/office/drawing/2014/main" id="{89D2F0AE-E627-4400-9F26-61F38D707AE5}"/>
+                <a16:creationId xmlns:a16="http://schemas.microsoft.com/office/drawing/2014/main" id="{637C3A47-76EA-4D21-8FED-1813BEDFF441}"/>
               </a:ext>
             </a:extLst>
           </p:cNvPr>
@@ -2979,7 +2979,7 @@
           <p:cNvPr id="12" name="">
             <a:extLst xmlns:a="http://schemas.openxmlformats.org/drawingml/2006/main">
               <a:ext uri="{FF2B5EF4-FFF2-40B4-BE49-F238E27FC236}">
-                <a16:creationId xmlns:a16="http://schemas.microsoft.com/office/drawing/2014/main" id="{9E252904-6AC4-42FB-B709-9C5099F66FE5}"/>
+                <a16:creationId xmlns:a16="http://schemas.microsoft.com/office/drawing/2014/main" id="{E9BC3CFE-5716-4D8F-878E-CE0505C25B8C}"/>
               </a:ext>
             </a:extLst>
           </p:cNvPr>
@@ -3036,7 +3036,7 @@
           <p:cNvPr id="13" name="">
             <a:extLst xmlns:a="http://schemas.openxmlformats.org/drawingml/2006/main">
               <a:ext uri="{FF2B5EF4-FFF2-40B4-BE49-F238E27FC236}">
-                <a16:creationId xmlns:a16="http://schemas.microsoft.com/office/drawing/2014/main" id="{9E96BC20-9304-4F8E-B568-D70505A8F81B}"/>
+                <a16:creationId xmlns:a16="http://schemas.microsoft.com/office/drawing/2014/main" id="{C4743A51-CB3D-4EDF-9C47-2757231C5447}"/>
               </a:ext>
             </a:extLst>
           </p:cNvPr>
@@ -3091,7 +3091,7 @@
     </p:spTree>
     <p:extLst>
       <p:ext uri="{BB962C8B-B14F-4D97-AF65-F5344CB8AC3E}">
-        <p14:creationId xmlns:p14="http://schemas.microsoft.com/office/powerpoint/2010/main" val="2533070"/>
+        <p14:creationId xmlns:p14="http://schemas.microsoft.com/office/powerpoint/2010/main" val="957101090"/>
       </p:ext>
     </p:extLst>
   </p:cSld>
@@ -3292,7 +3292,7 @@
           <p:cNvPr id="19" name="">
             <a:extLst xmlns:a="http://schemas.openxmlformats.org/drawingml/2006/main">
               <a:ext uri="{FF2B5EF4-FFF2-40B4-BE49-F238E27FC236}">
-                <a16:creationId xmlns:a16="http://schemas.microsoft.com/office/drawing/2014/main" id="{9C2437E4-1483-49CF-A1D3-B319B1E1AA21}"/>
+                <a16:creationId xmlns:a16="http://schemas.microsoft.com/office/drawing/2014/main" id="{26FEF09C-CC41-4E12-BEDC-4F224DAE4DDF}"/>
               </a:ext>
             </a:extLst>
           </p:cNvPr>
@@ -3324,7 +3324,7 @@
           <p:cNvPr id="2" name="">
             <a:extLst xmlns:a="http://schemas.openxmlformats.org/drawingml/2006/main">
               <a:ext uri="{FF2B5EF4-FFF2-40B4-BE49-F238E27FC236}">
-                <a16:creationId xmlns:a16="http://schemas.microsoft.com/office/drawing/2014/main" id="{91B8384B-C360-4173-B301-B50863B0F971}"/>
+                <a16:creationId xmlns:a16="http://schemas.microsoft.com/office/drawing/2014/main" id="{1769029F-25CF-4501-B2D4-9292C8F433AD}"/>
               </a:ext>
             </a:extLst>
           </p:cNvPr>
@@ -3381,7 +3381,7 @@
           <p:cNvPr id="3" name="">
             <a:extLst xmlns:a="http://schemas.openxmlformats.org/drawingml/2006/main">
               <a:ext uri="{FF2B5EF4-FFF2-40B4-BE49-F238E27FC236}">
-                <a16:creationId xmlns:a16="http://schemas.microsoft.com/office/drawing/2014/main" id="{15F45225-2AF7-4555-80A5-EE717EE54749}"/>
+                <a16:creationId xmlns:a16="http://schemas.microsoft.com/office/drawing/2014/main" id="{1EE5AF24-D2F7-485F-BF17-24DCFC385F68}"/>
               </a:ext>
             </a:extLst>
           </p:cNvPr>
@@ -3413,7 +3413,7 @@
           <p:cNvPr id="4" name="">
             <a:extLst xmlns:a="http://schemas.openxmlformats.org/drawingml/2006/main">
               <a:ext uri="{FF2B5EF4-FFF2-40B4-BE49-F238E27FC236}">
-                <a16:creationId xmlns:a16="http://schemas.microsoft.com/office/drawing/2014/main" id="{59BC3069-CF22-410D-B8DD-B6FC6B985721}"/>
+                <a16:creationId xmlns:a16="http://schemas.microsoft.com/office/drawing/2014/main" id="{C08092A6-3E45-48FE-88AD-4217CF884DE9}"/>
               </a:ext>
             </a:extLst>
           </p:cNvPr>
@@ -3470,7 +3470,7 @@
           <p:cNvPr id="5" name="">
             <a:extLst xmlns:a="http://schemas.openxmlformats.org/drawingml/2006/main">
               <a:ext uri="{FF2B5EF4-FFF2-40B4-BE49-F238E27FC236}">
-                <a16:creationId xmlns:a16="http://schemas.microsoft.com/office/drawing/2014/main" id="{62689251-03AF-4A0C-B39C-990E1F44FF2F}"/>
+                <a16:creationId xmlns:a16="http://schemas.microsoft.com/office/drawing/2014/main" id="{941C06D7-BD55-4C85-ABC6-AAFF0EFB93EA}"/>
               </a:ext>
             </a:extLst>
           </p:cNvPr>
@@ -3527,7 +3527,7 @@
           <p:cNvPr id="6" name="">
             <a:extLst xmlns:a="http://schemas.openxmlformats.org/drawingml/2006/main">
               <a:ext uri="{FF2B5EF4-FFF2-40B4-BE49-F238E27FC236}">
-                <a16:creationId xmlns:a16="http://schemas.microsoft.com/office/drawing/2014/main" id="{646C2F32-9226-421E-AD67-73D44A9FAB77}"/>
+                <a16:creationId xmlns:a16="http://schemas.microsoft.com/office/drawing/2014/main" id="{5B038A59-C243-479E-842D-6DF53CDF9BA2}"/>
               </a:ext>
             </a:extLst>
           </p:cNvPr>
@@ -3584,7 +3584,7 @@
           <p:cNvPr id="7" name="">
             <a:extLst xmlns:a="http://schemas.openxmlformats.org/drawingml/2006/main">
               <a:ext uri="{FF2B5EF4-FFF2-40B4-BE49-F238E27FC236}">
-                <a16:creationId xmlns:a16="http://schemas.microsoft.com/office/drawing/2014/main" id="{7C081DBB-0184-4C5A-9A80-1750517FC30D}"/>
+                <a16:creationId xmlns:a16="http://schemas.microsoft.com/office/drawing/2014/main" id="{476DA786-E406-4222-A466-DA6F001D308D}"/>
               </a:ext>
             </a:extLst>
           </p:cNvPr>
@@ -3616,7 +3616,7 @@
           <p:cNvPr id="8" name="">
             <a:extLst xmlns:a="http://schemas.openxmlformats.org/drawingml/2006/main">
               <a:ext uri="{FF2B5EF4-FFF2-40B4-BE49-F238E27FC236}">
-                <a16:creationId xmlns:a16="http://schemas.microsoft.com/office/drawing/2014/main" id="{C8E5DCA7-E3E2-4036-8E20-097E7AAA9CB9}"/>
+                <a16:creationId xmlns:a16="http://schemas.microsoft.com/office/drawing/2014/main" id="{9442F8B0-E453-4942-B13B-AAD35E3B0D2F}"/>
               </a:ext>
             </a:extLst>
           </p:cNvPr>
@@ -3673,7 +3673,7 @@
           <p:cNvPr id="9" name="">
             <a:extLst xmlns:a="http://schemas.openxmlformats.org/drawingml/2006/main">
               <a:ext uri="{FF2B5EF4-FFF2-40B4-BE49-F238E27FC236}">
-                <a16:creationId xmlns:a16="http://schemas.microsoft.com/office/drawing/2014/main" id="{FABD3427-1836-4E3F-890E-D943C78D8E3A}"/>
+                <a16:creationId xmlns:a16="http://schemas.microsoft.com/office/drawing/2014/main" id="{24FFECCF-2E50-458B-B6F0-AB1F9D5ED899}"/>
               </a:ext>
             </a:extLst>
           </p:cNvPr>
@@ -3730,7 +3730,7 @@
           <p:cNvPr id="10" name="">
             <a:extLst xmlns:a="http://schemas.openxmlformats.org/drawingml/2006/main">
               <a:ext uri="{FF2B5EF4-FFF2-40B4-BE49-F238E27FC236}">
-                <a16:creationId xmlns:a16="http://schemas.microsoft.com/office/drawing/2014/main" id="{4B0752A8-1871-453F-9416-7D639C805A2C}"/>
+                <a16:creationId xmlns:a16="http://schemas.microsoft.com/office/drawing/2014/main" id="{BFD65BB2-5511-47B0-BCC2-555DDE06A905}"/>
               </a:ext>
             </a:extLst>
           </p:cNvPr>
@@ -3787,7 +3787,7 @@
           <p:cNvPr id="11" name="">
             <a:extLst xmlns:a="http://schemas.openxmlformats.org/drawingml/2006/main">
               <a:ext uri="{FF2B5EF4-FFF2-40B4-BE49-F238E27FC236}">
-                <a16:creationId xmlns:a16="http://schemas.microsoft.com/office/drawing/2014/main" id="{6273F861-B25A-4AC3-A705-229EF46E170E}"/>
+                <a16:creationId xmlns:a16="http://schemas.microsoft.com/office/drawing/2014/main" id="{33DBB0C5-8575-440A-A378-BDDA02FD27FB}"/>
               </a:ext>
             </a:extLst>
           </p:cNvPr>
@@ -3821,7 +3821,7 @@
           <p:cNvPr id="12" name="">
             <a:extLst xmlns:a="http://schemas.openxmlformats.org/drawingml/2006/main">
               <a:ext uri="{FF2B5EF4-FFF2-40B4-BE49-F238E27FC236}">
-                <a16:creationId xmlns:a16="http://schemas.microsoft.com/office/drawing/2014/main" id="{63D9E2D6-A89D-42A3-AC82-9963A125C142}"/>
+                <a16:creationId xmlns:a16="http://schemas.microsoft.com/office/drawing/2014/main" id="{97089725-DAF6-4A7D-ADA6-AB0ECC1FD18A}"/>
               </a:ext>
             </a:extLst>
           </p:cNvPr>
@@ -3878,7 +3878,7 @@
           <p:cNvPr id="13" name="">
             <a:extLst xmlns:a="http://schemas.openxmlformats.org/drawingml/2006/main">
               <a:ext uri="{FF2B5EF4-FFF2-40B4-BE49-F238E27FC236}">
-                <a16:creationId xmlns:a16="http://schemas.microsoft.com/office/drawing/2014/main" id="{7FFDC1E6-DFC6-4329-9CE5-55C4847129A6}"/>
+                <a16:creationId xmlns:a16="http://schemas.microsoft.com/office/drawing/2014/main" id="{497A670F-4781-45D9-9D49-BF2AA06DC6BB}"/>
               </a:ext>
             </a:extLst>
           </p:cNvPr>
@@ -3935,7 +3935,7 @@
           <p:cNvPr id="14" name="">
             <a:extLst xmlns:a="http://schemas.openxmlformats.org/drawingml/2006/main">
               <a:ext uri="{FF2B5EF4-FFF2-40B4-BE49-F238E27FC236}">
-                <a16:creationId xmlns:a16="http://schemas.microsoft.com/office/drawing/2014/main" id="{638DFBC6-6643-4F3D-B3C2-4A6F2FAB3B08}"/>
+                <a16:creationId xmlns:a16="http://schemas.microsoft.com/office/drawing/2014/main" id="{623A22F2-9B74-4387-938B-FA61977FABA0}"/>
               </a:ext>
             </a:extLst>
           </p:cNvPr>
@@ -3992,7 +3992,7 @@
           <p:cNvPr id="15" name="">
             <a:extLst xmlns:a="http://schemas.openxmlformats.org/drawingml/2006/main">
               <a:ext uri="{FF2B5EF4-FFF2-40B4-BE49-F238E27FC236}">
-                <a16:creationId xmlns:a16="http://schemas.microsoft.com/office/drawing/2014/main" id="{EF6D9085-029A-4D04-8A7D-E679284CFE4C}"/>
+                <a16:creationId xmlns:a16="http://schemas.microsoft.com/office/drawing/2014/main" id="{694C7BE7-3E85-41E2-8575-405432066C9A}"/>
               </a:ext>
             </a:extLst>
           </p:cNvPr>
@@ -4026,7 +4026,7 @@
           <p:cNvPr id="16" name="">
             <a:extLst xmlns:a="http://schemas.openxmlformats.org/drawingml/2006/main">
               <a:ext uri="{FF2B5EF4-FFF2-40B4-BE49-F238E27FC236}">
-                <a16:creationId xmlns:a16="http://schemas.microsoft.com/office/drawing/2014/main" id="{15F487B8-92ED-4380-A2F7-3C131BA4BA4A}"/>
+                <a16:creationId xmlns:a16="http://schemas.microsoft.com/office/drawing/2014/main" id="{F2A36AC8-9743-40BF-BA80-6D026E461CD3}"/>
               </a:ext>
             </a:extLst>
           </p:cNvPr>
@@ -4083,7 +4083,7 @@
           <p:cNvPr id="17" name="">
             <a:extLst xmlns:a="http://schemas.openxmlformats.org/drawingml/2006/main">
               <a:ext uri="{FF2B5EF4-FFF2-40B4-BE49-F238E27FC236}">
-                <a16:creationId xmlns:a16="http://schemas.microsoft.com/office/drawing/2014/main" id="{920B843D-F988-47CC-B905-BC2B440362AD}"/>
+                <a16:creationId xmlns:a16="http://schemas.microsoft.com/office/drawing/2014/main" id="{21582D35-BFCA-4AB8-8764-A5D53B6810E8}"/>
               </a:ext>
             </a:extLst>
           </p:cNvPr>
@@ -4140,7 +4140,7 @@
           <p:cNvPr id="18" name="">
             <a:extLst xmlns:a="http://schemas.openxmlformats.org/drawingml/2006/main">
               <a:ext uri="{FF2B5EF4-FFF2-40B4-BE49-F238E27FC236}">
-                <a16:creationId xmlns:a16="http://schemas.microsoft.com/office/drawing/2014/main" id="{D36FE2A4-344A-40F6-B3F6-E5E6EF93549D}"/>
+                <a16:creationId xmlns:a16="http://schemas.microsoft.com/office/drawing/2014/main" id="{D9381407-FF6E-41F3-B0E1-21415B9ECB5B}"/>
               </a:ext>
             </a:extLst>
           </p:cNvPr>
@@ -4195,7 +4195,7 @@
     </p:spTree>
     <p:extLst>
       <p:ext uri="{BB962C8B-B14F-4D97-AF65-F5344CB8AC3E}">
-        <p14:creationId xmlns:p14="http://schemas.microsoft.com/office/powerpoint/2010/main" val="1249531425"/>
+        <p14:creationId xmlns:p14="http://schemas.microsoft.com/office/powerpoint/2010/main" val="2010569503"/>
       </p:ext>
     </p:extLst>
   </p:cSld>
@@ -4350,7 +4350,7 @@
           <p:cNvPr id="23" name="">
             <a:extLst xmlns:a="http://schemas.openxmlformats.org/drawingml/2006/main">
               <a:ext uri="{FF2B5EF4-FFF2-40B4-BE49-F238E27FC236}">
-                <a16:creationId xmlns:a16="http://schemas.microsoft.com/office/drawing/2014/main" id="{4B4AFC7B-D68B-45A1-8C5D-F00AB38AA1D5}"/>
+                <a16:creationId xmlns:a16="http://schemas.microsoft.com/office/drawing/2014/main" id="{45A9D67C-2C4C-4525-98AE-49AE46F6DD46}"/>
               </a:ext>
             </a:extLst>
           </p:cNvPr>
@@ -4382,7 +4382,7 @@
           <p:cNvPr id="2" name="">
             <a:extLst xmlns:a="http://schemas.openxmlformats.org/drawingml/2006/main">
               <a:ext uri="{FF2B5EF4-FFF2-40B4-BE49-F238E27FC236}">
-                <a16:creationId xmlns:a16="http://schemas.microsoft.com/office/drawing/2014/main" id="{64CD47A9-3E1A-4ECC-9FFA-727315B1CD1A}"/>
+                <a16:creationId xmlns:a16="http://schemas.microsoft.com/office/drawing/2014/main" id="{F79BFBA5-A166-40C3-BBF8-30CBAA5BA126}"/>
               </a:ext>
             </a:extLst>
           </p:cNvPr>
@@ -4439,7 +4439,7 @@
           <p:cNvPr id="3" name="">
             <a:extLst xmlns:a="http://schemas.openxmlformats.org/drawingml/2006/main">
               <a:ext uri="{FF2B5EF4-FFF2-40B4-BE49-F238E27FC236}">
-                <a16:creationId xmlns:a16="http://schemas.microsoft.com/office/drawing/2014/main" id="{9BB7CBC0-34CD-4AA6-9393-BEC8F9480785}"/>
+                <a16:creationId xmlns:a16="http://schemas.microsoft.com/office/drawing/2014/main" id="{5FC2CEE6-7854-48AE-AD13-EFEC98105F84}"/>
               </a:ext>
             </a:extLst>
           </p:cNvPr>
@@ -4471,7 +4471,7 @@
           <p:cNvPr id="4" name="">
             <a:extLst xmlns:a="http://schemas.openxmlformats.org/drawingml/2006/main">
               <a:ext uri="{FF2B5EF4-FFF2-40B4-BE49-F238E27FC236}">
-                <a16:creationId xmlns:a16="http://schemas.microsoft.com/office/drawing/2014/main" id="{B9593A2C-CA84-458D-8D1D-13AB6A66CCBF}"/>
+                <a16:creationId xmlns:a16="http://schemas.microsoft.com/office/drawing/2014/main" id="{3A05C135-791D-4BE4-99C4-6974421BF7DA}"/>
               </a:ext>
             </a:extLst>
           </p:cNvPr>
@@ -4528,7 +4528,7 @@
           <p:cNvPr id="5" name="">
             <a:extLst xmlns:a="http://schemas.openxmlformats.org/drawingml/2006/main">
               <a:ext uri="{FF2B5EF4-FFF2-40B4-BE49-F238E27FC236}">
-                <a16:creationId xmlns:a16="http://schemas.microsoft.com/office/drawing/2014/main" id="{0434BB72-F77C-451E-8DD0-48CBF47D3634}"/>
+                <a16:creationId xmlns:a16="http://schemas.microsoft.com/office/drawing/2014/main" id="{974EBB29-F50D-4970-97BB-15C5D41B5AE4}"/>
               </a:ext>
             </a:extLst>
           </p:cNvPr>
@@ -4585,7 +4585,7 @@
           <p:cNvPr id="6" name="">
             <a:extLst xmlns:a="http://schemas.openxmlformats.org/drawingml/2006/main">
               <a:ext uri="{FF2B5EF4-FFF2-40B4-BE49-F238E27FC236}">
-                <a16:creationId xmlns:a16="http://schemas.microsoft.com/office/drawing/2014/main" id="{2034ADD3-4FF9-4ECC-B32F-EE41D6595954}"/>
+                <a16:creationId xmlns:a16="http://schemas.microsoft.com/office/drawing/2014/main" id="{4AD1DF03-8B2E-416F-93FC-840C1F16107B}"/>
               </a:ext>
             </a:extLst>
           </p:cNvPr>
@@ -4642,7 +4642,7 @@
           <p:cNvPr id="7" name="">
             <a:extLst xmlns:a="http://schemas.openxmlformats.org/drawingml/2006/main">
               <a:ext uri="{FF2B5EF4-FFF2-40B4-BE49-F238E27FC236}">
-                <a16:creationId xmlns:a16="http://schemas.microsoft.com/office/drawing/2014/main" id="{9D27AEA2-316C-40BD-A781-B72736B10CD9}"/>
+                <a16:creationId xmlns:a16="http://schemas.microsoft.com/office/drawing/2014/main" id="{15FA9C0F-8002-40EA-983C-9797F7F3B9EE}"/>
               </a:ext>
             </a:extLst>
           </p:cNvPr>
@@ -4674,7 +4674,7 @@
           <p:cNvPr id="8" name="">
             <a:extLst xmlns:a="http://schemas.openxmlformats.org/drawingml/2006/main">
               <a:ext uri="{FF2B5EF4-FFF2-40B4-BE49-F238E27FC236}">
-                <a16:creationId xmlns:a16="http://schemas.microsoft.com/office/drawing/2014/main" id="{E15A69C2-00D9-4D34-B6EA-3060818AB465}"/>
+                <a16:creationId xmlns:a16="http://schemas.microsoft.com/office/drawing/2014/main" id="{8900173C-2F73-4D4F-90D3-F53B4EBAA0DA}"/>
               </a:ext>
             </a:extLst>
           </p:cNvPr>
@@ -4731,7 +4731,7 @@
           <p:cNvPr id="9" name="">
             <a:extLst xmlns:a="http://schemas.openxmlformats.org/drawingml/2006/main">
               <a:ext uri="{FF2B5EF4-FFF2-40B4-BE49-F238E27FC236}">
-                <a16:creationId xmlns:a16="http://schemas.microsoft.com/office/drawing/2014/main" id="{68CA72AC-3087-4BD0-BAC6-9CA7903E8D0B}"/>
+                <a16:creationId xmlns:a16="http://schemas.microsoft.com/office/drawing/2014/main" id="{32D1F6DB-3B26-4816-A504-4E0F5AA1C047}"/>
               </a:ext>
             </a:extLst>
           </p:cNvPr>
@@ -4788,7 +4788,7 @@
           <p:cNvPr id="10" name="">
             <a:extLst xmlns:a="http://schemas.openxmlformats.org/drawingml/2006/main">
               <a:ext uri="{FF2B5EF4-FFF2-40B4-BE49-F238E27FC236}">
-                <a16:creationId xmlns:a16="http://schemas.microsoft.com/office/drawing/2014/main" id="{876D4B61-B4F1-4D7E-AE0B-44F940EBC7C0}"/>
+                <a16:creationId xmlns:a16="http://schemas.microsoft.com/office/drawing/2014/main" id="{699B97C1-3F94-4A04-9542-A3020D80E986}"/>
               </a:ext>
             </a:extLst>
           </p:cNvPr>
@@ -4822,7 +4822,7 @@
           <p:cNvPr id="11" name="">
             <a:extLst xmlns:a="http://schemas.openxmlformats.org/drawingml/2006/main">
               <a:ext uri="{FF2B5EF4-FFF2-40B4-BE49-F238E27FC236}">
-                <a16:creationId xmlns:a16="http://schemas.microsoft.com/office/drawing/2014/main" id="{DB8C58CE-9597-4EEB-9CF9-1CC8B159BC1A}"/>
+                <a16:creationId xmlns:a16="http://schemas.microsoft.com/office/drawing/2014/main" id="{4F670E37-05D5-4865-BC9C-405F00EE1DBC}"/>
               </a:ext>
             </a:extLst>
           </p:cNvPr>
@@ -4854,7 +4854,7 @@
           <p:cNvPr id="12" name="">
             <a:extLst xmlns:a="http://schemas.openxmlformats.org/drawingml/2006/main">
               <a:ext uri="{FF2B5EF4-FFF2-40B4-BE49-F238E27FC236}">
-                <a16:creationId xmlns:a16="http://schemas.microsoft.com/office/drawing/2014/main" id="{06CFFDC6-94E2-4118-AC58-78741F0ED617}"/>
+                <a16:creationId xmlns:a16="http://schemas.microsoft.com/office/drawing/2014/main" id="{0E979118-5101-4CD1-A212-E17160A5654A}"/>
               </a:ext>
             </a:extLst>
           </p:cNvPr>
@@ -4911,7 +4911,7 @@
           <p:cNvPr id="13" name="">
             <a:extLst xmlns:a="http://schemas.openxmlformats.org/drawingml/2006/main">
               <a:ext uri="{FF2B5EF4-FFF2-40B4-BE49-F238E27FC236}">
-                <a16:creationId xmlns:a16="http://schemas.microsoft.com/office/drawing/2014/main" id="{018334B9-7A33-4B0C-A3FE-BD95CCA39FC0}"/>
+                <a16:creationId xmlns:a16="http://schemas.microsoft.com/office/drawing/2014/main" id="{052DC18E-0298-4591-B399-679FB26882CE}"/>
               </a:ext>
             </a:extLst>
           </p:cNvPr>
@@ -4968,7 +4968,7 @@
           <p:cNvPr id="14" name="">
             <a:extLst xmlns:a="http://schemas.openxmlformats.org/drawingml/2006/main">
               <a:ext uri="{FF2B5EF4-FFF2-40B4-BE49-F238E27FC236}">
-                <a16:creationId xmlns:a16="http://schemas.microsoft.com/office/drawing/2014/main" id="{644DF876-512E-4349-BC06-914115F826C1}"/>
+                <a16:creationId xmlns:a16="http://schemas.microsoft.com/office/drawing/2014/main" id="{C57C4FD1-0C12-4CE4-84BA-C62BEECA36D9}"/>
               </a:ext>
             </a:extLst>
           </p:cNvPr>
@@ -5002,7 +5002,7 @@
           <p:cNvPr id="15" name="">
             <a:extLst xmlns:a="http://schemas.openxmlformats.org/drawingml/2006/main">
               <a:ext uri="{FF2B5EF4-FFF2-40B4-BE49-F238E27FC236}">
-                <a16:creationId xmlns:a16="http://schemas.microsoft.com/office/drawing/2014/main" id="{CCF5601D-6DE7-4473-A587-44A7C65B8141}"/>
+                <a16:creationId xmlns:a16="http://schemas.microsoft.com/office/drawing/2014/main" id="{C9DB2AB5-4734-41A5-9800-3F424A723DA1}"/>
               </a:ext>
             </a:extLst>
           </p:cNvPr>
@@ -5034,7 +5034,7 @@
           <p:cNvPr id="16" name="">
             <a:extLst xmlns:a="http://schemas.openxmlformats.org/drawingml/2006/main">
               <a:ext uri="{FF2B5EF4-FFF2-40B4-BE49-F238E27FC236}">
-                <a16:creationId xmlns:a16="http://schemas.microsoft.com/office/drawing/2014/main" id="{35556AB4-118A-4EA8-90BB-5998AD2220A0}"/>
+                <a16:creationId xmlns:a16="http://schemas.microsoft.com/office/drawing/2014/main" id="{AE2FEE6E-4E86-496C-9AB6-CAADB8708816}"/>
               </a:ext>
             </a:extLst>
           </p:cNvPr>
@@ -5091,7 +5091,7 @@
           <p:cNvPr id="17" name="">
             <a:extLst xmlns:a="http://schemas.openxmlformats.org/drawingml/2006/main">
               <a:ext uri="{FF2B5EF4-FFF2-40B4-BE49-F238E27FC236}">
-                <a16:creationId xmlns:a16="http://schemas.microsoft.com/office/drawing/2014/main" id="{8283E198-80FA-45B8-9798-BAEC73ED2502}"/>
+                <a16:creationId xmlns:a16="http://schemas.microsoft.com/office/drawing/2014/main" id="{3EAE9574-1589-4BAF-8B8E-8DBD51646AD4}"/>
               </a:ext>
             </a:extLst>
           </p:cNvPr>
@@ -5148,7 +5148,7 @@
           <p:cNvPr id="18" name="">
             <a:extLst xmlns:a="http://schemas.openxmlformats.org/drawingml/2006/main">
               <a:ext uri="{FF2B5EF4-FFF2-40B4-BE49-F238E27FC236}">
-                <a16:creationId xmlns:a16="http://schemas.microsoft.com/office/drawing/2014/main" id="{39BFBD72-5B35-46D6-BB7F-8A251AD5E8C9}"/>
+                <a16:creationId xmlns:a16="http://schemas.microsoft.com/office/drawing/2014/main" id="{DB2AEA17-3A19-4073-9F6A-56ECA92D0C73}"/>
               </a:ext>
             </a:extLst>
           </p:cNvPr>
@@ -5182,7 +5182,7 @@
           <p:cNvPr id="19" name="">
             <a:extLst xmlns:a="http://schemas.openxmlformats.org/drawingml/2006/main">
               <a:ext uri="{FF2B5EF4-FFF2-40B4-BE49-F238E27FC236}">
-                <a16:creationId xmlns:a16="http://schemas.microsoft.com/office/drawing/2014/main" id="{7F95F65C-71B9-411A-BF3B-D7C0B6D3BFBF}"/>
+                <a16:creationId xmlns:a16="http://schemas.microsoft.com/office/drawing/2014/main" id="{E53BC34E-5443-4B3F-9431-6B31619F0653}"/>
               </a:ext>
             </a:extLst>
           </p:cNvPr>
@@ -5214,7 +5214,7 @@
           <p:cNvPr id="20" name="">
             <a:extLst xmlns:a="http://schemas.openxmlformats.org/drawingml/2006/main">
               <a:ext uri="{FF2B5EF4-FFF2-40B4-BE49-F238E27FC236}">
-                <a16:creationId xmlns:a16="http://schemas.microsoft.com/office/drawing/2014/main" id="{D645AD76-1CF1-413A-A9C2-F01A9FDB5CCC}"/>
+                <a16:creationId xmlns:a16="http://schemas.microsoft.com/office/drawing/2014/main" id="{A56D26DE-2F76-4BB0-8A3F-1485BF755B3C}"/>
               </a:ext>
             </a:extLst>
           </p:cNvPr>
@@ -5271,7 +5271,7 @@
           <p:cNvPr id="21" name="">
             <a:extLst xmlns:a="http://schemas.openxmlformats.org/drawingml/2006/main">
               <a:ext uri="{FF2B5EF4-FFF2-40B4-BE49-F238E27FC236}">
-                <a16:creationId xmlns:a16="http://schemas.microsoft.com/office/drawing/2014/main" id="{0393B5C2-AFF7-4186-8F9E-AC659685F782}"/>
+                <a16:creationId xmlns:a16="http://schemas.microsoft.com/office/drawing/2014/main" id="{B11B395A-9A19-489E-A6CE-322E2DB5E231}"/>
               </a:ext>
             </a:extLst>
           </p:cNvPr>
@@ -5328,7 +5328,7 @@
           <p:cNvPr id="22" name="">
             <a:extLst xmlns:a="http://schemas.openxmlformats.org/drawingml/2006/main">
               <a:ext uri="{FF2B5EF4-FFF2-40B4-BE49-F238E27FC236}">
-                <a16:creationId xmlns:a16="http://schemas.microsoft.com/office/drawing/2014/main" id="{DE704AC7-5FED-480D-8ECE-CC52C03C57F3}"/>
+                <a16:creationId xmlns:a16="http://schemas.microsoft.com/office/drawing/2014/main" id="{B72AB36C-67C0-4005-861F-37F0CE2629F1}"/>
               </a:ext>
             </a:extLst>
           </p:cNvPr>
@@ -5383,7 +5383,7 @@
     </p:spTree>
     <p:extLst>
       <p:ext uri="{BB962C8B-B14F-4D97-AF65-F5344CB8AC3E}">
-        <p14:creationId xmlns:p14="http://schemas.microsoft.com/office/powerpoint/2010/main" val="469555619"/>
+        <p14:creationId xmlns:p14="http://schemas.microsoft.com/office/powerpoint/2010/main" val="788118463"/>
       </p:ext>
     </p:extLst>
   </p:cSld>
@@ -5584,7 +5584,7 @@
           <p:cNvPr id="23" name="">
             <a:extLst xmlns:a="http://schemas.openxmlformats.org/drawingml/2006/main">
               <a:ext uri="{FF2B5EF4-FFF2-40B4-BE49-F238E27FC236}">
-                <a16:creationId xmlns:a16="http://schemas.microsoft.com/office/drawing/2014/main" id="{9940D561-8506-4EDE-A4E3-69095F28370A}"/>
+                <a16:creationId xmlns:a16="http://schemas.microsoft.com/office/drawing/2014/main" id="{63F3DCED-1163-40DC-92ED-54B4139342D4}"/>
               </a:ext>
             </a:extLst>
           </p:cNvPr>
@@ -5616,7 +5616,7 @@
           <p:cNvPr id="2" name="">
             <a:extLst xmlns:a="http://schemas.openxmlformats.org/drawingml/2006/main">
               <a:ext uri="{FF2B5EF4-FFF2-40B4-BE49-F238E27FC236}">
-                <a16:creationId xmlns:a16="http://schemas.microsoft.com/office/drawing/2014/main" id="{F123B153-C6F0-408E-A784-882B1B61CE70}"/>
+                <a16:creationId xmlns:a16="http://schemas.microsoft.com/office/drawing/2014/main" id="{0068A805-5C29-4DB8-993E-ABD115DBB196}"/>
               </a:ext>
             </a:extLst>
           </p:cNvPr>
@@ -5673,7 +5673,7 @@
           <p:cNvPr id="3" name="">
             <a:extLst xmlns:a="http://schemas.openxmlformats.org/drawingml/2006/main">
               <a:ext uri="{FF2B5EF4-FFF2-40B4-BE49-F238E27FC236}">
-                <a16:creationId xmlns:a16="http://schemas.microsoft.com/office/drawing/2014/main" id="{134C0A20-AADD-48A0-A046-2C0AA5ACA12A}"/>
+                <a16:creationId xmlns:a16="http://schemas.microsoft.com/office/drawing/2014/main" id="{6442DEC4-4057-43E6-BBAE-1A25C87CA804}"/>
               </a:ext>
             </a:extLst>
           </p:cNvPr>
@@ -5705,7 +5705,7 @@
           <p:cNvPr id="4" name="">
             <a:extLst xmlns:a="http://schemas.openxmlformats.org/drawingml/2006/main">
               <a:ext uri="{FF2B5EF4-FFF2-40B4-BE49-F238E27FC236}">
-                <a16:creationId xmlns:a16="http://schemas.microsoft.com/office/drawing/2014/main" id="{F0C6847F-C0C5-4C6C-AD1B-77AC6D629C18}"/>
+                <a16:creationId xmlns:a16="http://schemas.microsoft.com/office/drawing/2014/main" id="{42935B26-4920-4D1E-97E9-B220871A852C}"/>
               </a:ext>
             </a:extLst>
           </p:cNvPr>
@@ -5762,7 +5762,7 @@
           <p:cNvPr id="5" name="">
             <a:extLst xmlns:a="http://schemas.openxmlformats.org/drawingml/2006/main">
               <a:ext uri="{FF2B5EF4-FFF2-40B4-BE49-F238E27FC236}">
-                <a16:creationId xmlns:a16="http://schemas.microsoft.com/office/drawing/2014/main" id="{A6ED477B-877F-46A4-A07A-0C3D1FF29132}"/>
+                <a16:creationId xmlns:a16="http://schemas.microsoft.com/office/drawing/2014/main" id="{1A30F06E-1721-48A0-87AE-54E442CA8150}"/>
               </a:ext>
             </a:extLst>
           </p:cNvPr>
@@ -5819,7 +5819,7 @@
           <p:cNvPr id="6" name="">
             <a:extLst xmlns:a="http://schemas.openxmlformats.org/drawingml/2006/main">
               <a:ext uri="{FF2B5EF4-FFF2-40B4-BE49-F238E27FC236}">
-                <a16:creationId xmlns:a16="http://schemas.microsoft.com/office/drawing/2014/main" id="{A8462F55-5141-454F-A512-2BAF99A9C21B}"/>
+                <a16:creationId xmlns:a16="http://schemas.microsoft.com/office/drawing/2014/main" id="{A7EFA0AC-67E9-4B48-AEDD-FB07A146F69D}"/>
               </a:ext>
             </a:extLst>
           </p:cNvPr>
@@ -5876,7 +5876,7 @@
           <p:cNvPr id="7" name="">
             <a:extLst xmlns:a="http://schemas.openxmlformats.org/drawingml/2006/main">
               <a:ext uri="{FF2B5EF4-FFF2-40B4-BE49-F238E27FC236}">
-                <a16:creationId xmlns:a16="http://schemas.microsoft.com/office/drawing/2014/main" id="{6E49245C-251A-416A-93FB-8CD9057596A0}"/>
+                <a16:creationId xmlns:a16="http://schemas.microsoft.com/office/drawing/2014/main" id="{C0516A28-6D2E-4B6D-BEE2-8390E556C13C}"/>
               </a:ext>
             </a:extLst>
           </p:cNvPr>
@@ -5908,7 +5908,7 @@
           <p:cNvPr id="8" name="">
             <a:extLst xmlns:a="http://schemas.openxmlformats.org/drawingml/2006/main">
               <a:ext uri="{FF2B5EF4-FFF2-40B4-BE49-F238E27FC236}">
-                <a16:creationId xmlns:a16="http://schemas.microsoft.com/office/drawing/2014/main" id="{782B1072-2BBD-49F6-97E7-5193952380D5}"/>
+                <a16:creationId xmlns:a16="http://schemas.microsoft.com/office/drawing/2014/main" id="{03579BE9-DC93-4FDE-9F09-E8B323277C2F}"/>
               </a:ext>
             </a:extLst>
           </p:cNvPr>
@@ -5965,7 +5965,7 @@
           <p:cNvPr id="9" name="">
             <a:extLst xmlns:a="http://schemas.openxmlformats.org/drawingml/2006/main">
               <a:ext uri="{FF2B5EF4-FFF2-40B4-BE49-F238E27FC236}">
-                <a16:creationId xmlns:a16="http://schemas.microsoft.com/office/drawing/2014/main" id="{9C1280E6-1861-441B-8428-FA9A44FB335C}"/>
+                <a16:creationId xmlns:a16="http://schemas.microsoft.com/office/drawing/2014/main" id="{7FF77167-3829-408D-80FE-69C3ABDB4965}"/>
               </a:ext>
             </a:extLst>
           </p:cNvPr>
@@ -6022,7 +6022,7 @@
           <p:cNvPr id="10" name="">
             <a:extLst xmlns:a="http://schemas.openxmlformats.org/drawingml/2006/main">
               <a:ext uri="{FF2B5EF4-FFF2-40B4-BE49-F238E27FC236}">
-                <a16:creationId xmlns:a16="http://schemas.microsoft.com/office/drawing/2014/main" id="{403722F9-58C9-4E50-94B3-5071D060E4D9}"/>
+                <a16:creationId xmlns:a16="http://schemas.microsoft.com/office/drawing/2014/main" id="{07AC9F9D-3E87-408A-91F2-324AFFCAAF14}"/>
               </a:ext>
             </a:extLst>
           </p:cNvPr>
@@ -6056,7 +6056,7 @@
           <p:cNvPr id="11" name="">
             <a:extLst xmlns:a="http://schemas.openxmlformats.org/drawingml/2006/main">
               <a:ext uri="{FF2B5EF4-FFF2-40B4-BE49-F238E27FC236}">
-                <a16:creationId xmlns:a16="http://schemas.microsoft.com/office/drawing/2014/main" id="{AC95C1B6-9916-4A08-8482-B8CE85F4517A}"/>
+                <a16:creationId xmlns:a16="http://schemas.microsoft.com/office/drawing/2014/main" id="{31728C85-0D61-4A06-9EEC-ABF74837CC6A}"/>
               </a:ext>
             </a:extLst>
           </p:cNvPr>
@@ -6088,7 +6088,7 @@
           <p:cNvPr id="12" name="">
             <a:extLst xmlns:a="http://schemas.openxmlformats.org/drawingml/2006/main">
               <a:ext uri="{FF2B5EF4-FFF2-40B4-BE49-F238E27FC236}">
-                <a16:creationId xmlns:a16="http://schemas.microsoft.com/office/drawing/2014/main" id="{CF4CD733-8EE3-4DD6-934B-50004DFF9BEE}"/>
+                <a16:creationId xmlns:a16="http://schemas.microsoft.com/office/drawing/2014/main" id="{BB57EE9D-D27C-433A-82E8-EC93C0C927C2}"/>
               </a:ext>
             </a:extLst>
           </p:cNvPr>
@@ -6145,7 +6145,7 @@
           <p:cNvPr id="13" name="">
             <a:extLst xmlns:a="http://schemas.openxmlformats.org/drawingml/2006/main">
               <a:ext uri="{FF2B5EF4-FFF2-40B4-BE49-F238E27FC236}">
-                <a16:creationId xmlns:a16="http://schemas.microsoft.com/office/drawing/2014/main" id="{02C2E060-AC0B-4FB4-8026-996989CE6BC8}"/>
+                <a16:creationId xmlns:a16="http://schemas.microsoft.com/office/drawing/2014/main" id="{BC2CCBDA-3A0A-44B2-B785-B56D88CB6644}"/>
               </a:ext>
             </a:extLst>
           </p:cNvPr>
@@ -6202,7 +6202,7 @@
           <p:cNvPr id="14" name="">
             <a:extLst xmlns:a="http://schemas.openxmlformats.org/drawingml/2006/main">
               <a:ext uri="{FF2B5EF4-FFF2-40B4-BE49-F238E27FC236}">
-                <a16:creationId xmlns:a16="http://schemas.microsoft.com/office/drawing/2014/main" id="{23C6503D-2803-41CB-8EE5-0DFD6386512C}"/>
+                <a16:creationId xmlns:a16="http://schemas.microsoft.com/office/drawing/2014/main" id="{B40928EC-1029-4E39-92F1-BC6255442E08}"/>
               </a:ext>
             </a:extLst>
           </p:cNvPr>
@@ -6236,7 +6236,7 @@
           <p:cNvPr id="15" name="">
             <a:extLst xmlns:a="http://schemas.openxmlformats.org/drawingml/2006/main">
               <a:ext uri="{FF2B5EF4-FFF2-40B4-BE49-F238E27FC236}">
-                <a16:creationId xmlns:a16="http://schemas.microsoft.com/office/drawing/2014/main" id="{B03DD405-480E-4BB9-BCFD-46DD4A8BBC72}"/>
+                <a16:creationId xmlns:a16="http://schemas.microsoft.com/office/drawing/2014/main" id="{7456EE06-493E-4F44-8FF6-0A4BE0427896}"/>
               </a:ext>
             </a:extLst>
           </p:cNvPr>
@@ -6268,7 +6268,7 @@
           <p:cNvPr id="16" name="">
             <a:extLst xmlns:a="http://schemas.openxmlformats.org/drawingml/2006/main">
               <a:ext uri="{FF2B5EF4-FFF2-40B4-BE49-F238E27FC236}">
-                <a16:creationId xmlns:a16="http://schemas.microsoft.com/office/drawing/2014/main" id="{8485A7C5-A390-467F-B158-F2FF94F90181}"/>
+                <a16:creationId xmlns:a16="http://schemas.microsoft.com/office/drawing/2014/main" id="{70DA3445-21C4-4E60-8AF5-806BAD248FA0}"/>
               </a:ext>
             </a:extLst>
           </p:cNvPr>
@@ -6325,7 +6325,7 @@
           <p:cNvPr id="17" name="">
             <a:extLst xmlns:a="http://schemas.openxmlformats.org/drawingml/2006/main">
               <a:ext uri="{FF2B5EF4-FFF2-40B4-BE49-F238E27FC236}">
-                <a16:creationId xmlns:a16="http://schemas.microsoft.com/office/drawing/2014/main" id="{45A19D2B-3FCB-46CC-89F1-320ED2700689}"/>
+                <a16:creationId xmlns:a16="http://schemas.microsoft.com/office/drawing/2014/main" id="{3FB92AF5-1387-4164-A093-1ACAA5569036}"/>
               </a:ext>
             </a:extLst>
           </p:cNvPr>
@@ -6382,7 +6382,7 @@
           <p:cNvPr id="18" name="">
             <a:extLst xmlns:a="http://schemas.openxmlformats.org/drawingml/2006/main">
               <a:ext uri="{FF2B5EF4-FFF2-40B4-BE49-F238E27FC236}">
-                <a16:creationId xmlns:a16="http://schemas.microsoft.com/office/drawing/2014/main" id="{9CB3F475-E3EE-4F13-94CD-C18D7B3A21F1}"/>
+                <a16:creationId xmlns:a16="http://schemas.microsoft.com/office/drawing/2014/main" id="{5BB3A087-27F2-43D2-93E3-83B3BEEE4F07}"/>
               </a:ext>
             </a:extLst>
           </p:cNvPr>
@@ -6416,7 +6416,7 @@
           <p:cNvPr id="19" name="">
             <a:extLst xmlns:a="http://schemas.openxmlformats.org/drawingml/2006/main">
               <a:ext uri="{FF2B5EF4-FFF2-40B4-BE49-F238E27FC236}">
-                <a16:creationId xmlns:a16="http://schemas.microsoft.com/office/drawing/2014/main" id="{09FB7945-64A1-4677-9607-AD93894C25CF}"/>
+                <a16:creationId xmlns:a16="http://schemas.microsoft.com/office/drawing/2014/main" id="{5FE057AC-D0AA-4D0B-8B80-2800A9930B91}"/>
               </a:ext>
             </a:extLst>
           </p:cNvPr>
@@ -6448,7 +6448,7 @@
           <p:cNvPr id="20" name="">
             <a:extLst xmlns:a="http://schemas.openxmlformats.org/drawingml/2006/main">
               <a:ext uri="{FF2B5EF4-FFF2-40B4-BE49-F238E27FC236}">
-                <a16:creationId xmlns:a16="http://schemas.microsoft.com/office/drawing/2014/main" id="{1083E59F-9CFE-42CD-8AD4-BC4A43619A6F}"/>
+                <a16:creationId xmlns:a16="http://schemas.microsoft.com/office/drawing/2014/main" id="{78F02E72-28F0-4F8C-8DBB-876B1F161B85}"/>
               </a:ext>
             </a:extLst>
           </p:cNvPr>
@@ -6505,7 +6505,7 @@
           <p:cNvPr id="21" name="">
             <a:extLst xmlns:a="http://schemas.openxmlformats.org/drawingml/2006/main">
               <a:ext uri="{FF2B5EF4-FFF2-40B4-BE49-F238E27FC236}">
-                <a16:creationId xmlns:a16="http://schemas.microsoft.com/office/drawing/2014/main" id="{CD07425A-6A36-4A3D-87F7-72099F304C47}"/>
+                <a16:creationId xmlns:a16="http://schemas.microsoft.com/office/drawing/2014/main" id="{59A37667-B697-48B9-835B-C4DA66CE8A8D}"/>
               </a:ext>
             </a:extLst>
           </p:cNvPr>
@@ -6562,7 +6562,7 @@
           <p:cNvPr id="22" name="">
             <a:extLst xmlns:a="http://schemas.openxmlformats.org/drawingml/2006/main">
               <a:ext uri="{FF2B5EF4-FFF2-40B4-BE49-F238E27FC236}">
-                <a16:creationId xmlns:a16="http://schemas.microsoft.com/office/drawing/2014/main" id="{C184BE43-CF0B-4767-87C8-CB60348BBDFC}"/>
+                <a16:creationId xmlns:a16="http://schemas.microsoft.com/office/drawing/2014/main" id="{CA6769A4-111E-47B3-8A30-00D7F0FDB560}"/>
               </a:ext>
             </a:extLst>
           </p:cNvPr>
@@ -6617,7 +6617,7 @@
     </p:spTree>
     <p:extLst>
       <p:ext uri="{BB962C8B-B14F-4D97-AF65-F5344CB8AC3E}">
-        <p14:creationId xmlns:p14="http://schemas.microsoft.com/office/powerpoint/2010/main" val="2051542662"/>
+        <p14:creationId xmlns:p14="http://schemas.microsoft.com/office/powerpoint/2010/main" val="335273183"/>
       </p:ext>
     </p:extLst>
   </p:cSld>
@@ -6818,7 +6818,7 @@
           <p:cNvPr id="16" name="">
             <a:extLst xmlns:a="http://schemas.openxmlformats.org/drawingml/2006/main">
               <a:ext uri="{FF2B5EF4-FFF2-40B4-BE49-F238E27FC236}">
-                <a16:creationId xmlns:a16="http://schemas.microsoft.com/office/drawing/2014/main" id="{91D3B64C-1979-4B27-BAE6-93D4733E9836}"/>
+                <a16:creationId xmlns:a16="http://schemas.microsoft.com/office/drawing/2014/main" id="{5F9B77FC-4D2B-4459-9641-FEEF80E3B150}"/>
               </a:ext>
             </a:extLst>
           </p:cNvPr>
@@ -6850,7 +6850,7 @@
           <p:cNvPr id="2" name="">
             <a:extLst xmlns:a="http://schemas.openxmlformats.org/drawingml/2006/main">
               <a:ext uri="{FF2B5EF4-FFF2-40B4-BE49-F238E27FC236}">
-                <a16:creationId xmlns:a16="http://schemas.microsoft.com/office/drawing/2014/main" id="{4B25316D-4C94-4779-B882-E14A8856959A}"/>
+                <a16:creationId xmlns:a16="http://schemas.microsoft.com/office/drawing/2014/main" id="{CFBDB094-1C51-4102-BCCF-48D83B1B8591}"/>
               </a:ext>
             </a:extLst>
           </p:cNvPr>
@@ -6907,7 +6907,7 @@
           <p:cNvPr id="3" name="">
             <a:extLst xmlns:a="http://schemas.openxmlformats.org/drawingml/2006/main">
               <a:ext uri="{FF2B5EF4-FFF2-40B4-BE49-F238E27FC236}">
-                <a16:creationId xmlns:a16="http://schemas.microsoft.com/office/drawing/2014/main" id="{947A3CCC-914B-4DB4-91F3-89E97722BCEF}"/>
+                <a16:creationId xmlns:a16="http://schemas.microsoft.com/office/drawing/2014/main" id="{BC172B67-9AFF-4B3F-BFC9-4065527921F5}"/>
               </a:ext>
             </a:extLst>
           </p:cNvPr>
@@ -6939,7 +6939,7 @@
           <p:cNvPr id="4" name="">
             <a:extLst xmlns:a="http://schemas.openxmlformats.org/drawingml/2006/main">
               <a:ext uri="{FF2B5EF4-FFF2-40B4-BE49-F238E27FC236}">
-                <a16:creationId xmlns:a16="http://schemas.microsoft.com/office/drawing/2014/main" id="{389AF83A-5ADA-4D76-833F-B8289A1EC277}"/>
+                <a16:creationId xmlns:a16="http://schemas.microsoft.com/office/drawing/2014/main" id="{41A7A46D-3371-4710-BA1C-C3BDF6532420}"/>
               </a:ext>
             </a:extLst>
           </p:cNvPr>
@@ -6996,7 +6996,7 @@
           <p:cNvPr id="5" name="">
             <a:extLst xmlns:a="http://schemas.openxmlformats.org/drawingml/2006/main">
               <a:ext uri="{FF2B5EF4-FFF2-40B4-BE49-F238E27FC236}">
-                <a16:creationId xmlns:a16="http://schemas.microsoft.com/office/drawing/2014/main" id="{EBADC7C0-0D54-467B-B319-430674BEA4EE}"/>
+                <a16:creationId xmlns:a16="http://schemas.microsoft.com/office/drawing/2014/main" id="{C59AD4DB-BB83-4549-93EA-279BEDCBF966}"/>
               </a:ext>
             </a:extLst>
           </p:cNvPr>
@@ -7053,7 +7053,7 @@
           <p:cNvPr id="6" name="">
             <a:extLst xmlns:a="http://schemas.openxmlformats.org/drawingml/2006/main">
               <a:ext uri="{FF2B5EF4-FFF2-40B4-BE49-F238E27FC236}">
-                <a16:creationId xmlns:a16="http://schemas.microsoft.com/office/drawing/2014/main" id="{F2A9418A-15CB-45C9-864E-E9408F72586A}"/>
+                <a16:creationId xmlns:a16="http://schemas.microsoft.com/office/drawing/2014/main" id="{6892AE78-E090-4FA3-B07B-571CADB49196}"/>
               </a:ext>
             </a:extLst>
           </p:cNvPr>
@@ -7110,7 +7110,7 @@
           <p:cNvPr id="7" name="">
             <a:extLst xmlns:a="http://schemas.openxmlformats.org/drawingml/2006/main">
               <a:ext uri="{FF2B5EF4-FFF2-40B4-BE49-F238E27FC236}">
-                <a16:creationId xmlns:a16="http://schemas.microsoft.com/office/drawing/2014/main" id="{0E716D38-4C9A-4E44-B8B0-AF28D362ED5D}"/>
+                <a16:creationId xmlns:a16="http://schemas.microsoft.com/office/drawing/2014/main" id="{A4E91A86-4F69-4F1E-977D-47DE333E39E0}"/>
               </a:ext>
             </a:extLst>
           </p:cNvPr>
@@ -7142,7 +7142,7 @@
           <p:cNvPr id="8" name="">
             <a:extLst xmlns:a="http://schemas.openxmlformats.org/drawingml/2006/main">
               <a:ext uri="{FF2B5EF4-FFF2-40B4-BE49-F238E27FC236}">
-                <a16:creationId xmlns:a16="http://schemas.microsoft.com/office/drawing/2014/main" id="{0053929F-A8AD-44C0-A511-E591B2B5B5CB}"/>
+                <a16:creationId xmlns:a16="http://schemas.microsoft.com/office/drawing/2014/main" id="{EF8813E7-0460-4F76-A497-CF6A42543B33}"/>
               </a:ext>
             </a:extLst>
           </p:cNvPr>
@@ -7199,7 +7199,7 @@
           <p:cNvPr id="9" name="">
             <a:extLst xmlns:a="http://schemas.openxmlformats.org/drawingml/2006/main">
               <a:ext uri="{FF2B5EF4-FFF2-40B4-BE49-F238E27FC236}">
-                <a16:creationId xmlns:a16="http://schemas.microsoft.com/office/drawing/2014/main" id="{8DCD3335-79EC-4858-96A1-45DAEFFC1DD7}"/>
+                <a16:creationId xmlns:a16="http://schemas.microsoft.com/office/drawing/2014/main" id="{6B3E0DA5-ADDA-45DB-AC80-1DAAD38A7F84}"/>
               </a:ext>
             </a:extLst>
           </p:cNvPr>
@@ -7256,7 +7256,7 @@
           <p:cNvPr id="10" name="">
             <a:extLst xmlns:a="http://schemas.openxmlformats.org/drawingml/2006/main">
               <a:ext uri="{FF2B5EF4-FFF2-40B4-BE49-F238E27FC236}">
-                <a16:creationId xmlns:a16="http://schemas.microsoft.com/office/drawing/2014/main" id="{799BB1A1-19C8-43E3-A88B-90DECD4F33C6}"/>
+                <a16:creationId xmlns:a16="http://schemas.microsoft.com/office/drawing/2014/main" id="{D776482F-E8F5-4F97-8234-C52268C95FE7}"/>
               </a:ext>
             </a:extLst>
           </p:cNvPr>
@@ -7313,7 +7313,7 @@
           <p:cNvPr id="11" name="">
             <a:extLst xmlns:a="http://schemas.openxmlformats.org/drawingml/2006/main">
               <a:ext uri="{FF2B5EF4-FFF2-40B4-BE49-F238E27FC236}">
-                <a16:creationId xmlns:a16="http://schemas.microsoft.com/office/drawing/2014/main" id="{823F47A0-1104-4CA9-B38B-320A34F9B636}"/>
+                <a16:creationId xmlns:a16="http://schemas.microsoft.com/office/drawing/2014/main" id="{6F481F9E-206E-4261-98FA-88E38D618874}"/>
               </a:ext>
             </a:extLst>
           </p:cNvPr>
@@ -7345,7 +7345,7 @@
           <p:cNvPr id="12" name="">
             <a:extLst xmlns:a="http://schemas.openxmlformats.org/drawingml/2006/main">
               <a:ext uri="{FF2B5EF4-FFF2-40B4-BE49-F238E27FC236}">
-                <a16:creationId xmlns:a16="http://schemas.microsoft.com/office/drawing/2014/main" id="{B425A2CF-6CEB-4602-B9AE-D2E74F4988DA}"/>
+                <a16:creationId xmlns:a16="http://schemas.microsoft.com/office/drawing/2014/main" id="{3C2E8F7D-8F73-4598-808F-8CD685756A97}"/>
               </a:ext>
             </a:extLst>
           </p:cNvPr>
@@ -7402,7 +7402,7 @@
           <p:cNvPr id="13" name="">
             <a:extLst xmlns:a="http://schemas.openxmlformats.org/drawingml/2006/main">
               <a:ext uri="{FF2B5EF4-FFF2-40B4-BE49-F238E27FC236}">
-                <a16:creationId xmlns:a16="http://schemas.microsoft.com/office/drawing/2014/main" id="{AB92DF28-68DC-4472-BC87-5677B96FC477}"/>
+                <a16:creationId xmlns:a16="http://schemas.microsoft.com/office/drawing/2014/main" id="{69FC2049-FA53-4B1E-8B59-92766E3CFD4F}"/>
               </a:ext>
             </a:extLst>
           </p:cNvPr>
@@ -7459,7 +7459,7 @@
           <p:cNvPr id="14" name="">
             <a:extLst xmlns:a="http://schemas.openxmlformats.org/drawingml/2006/main">
               <a:ext uri="{FF2B5EF4-FFF2-40B4-BE49-F238E27FC236}">
-                <a16:creationId xmlns:a16="http://schemas.microsoft.com/office/drawing/2014/main" id="{E8AC61DF-8317-4598-ADA9-5BFC5B4730FF}"/>
+                <a16:creationId xmlns:a16="http://schemas.microsoft.com/office/drawing/2014/main" id="{AB6427F7-D458-4ECE-9109-90EB44D13FBB}"/>
               </a:ext>
             </a:extLst>
           </p:cNvPr>
@@ -7516,7 +7516,7 @@
           <p:cNvPr id="15" name="">
             <a:extLst xmlns:a="http://schemas.openxmlformats.org/drawingml/2006/main">
               <a:ext uri="{FF2B5EF4-FFF2-40B4-BE49-F238E27FC236}">
-                <a16:creationId xmlns:a16="http://schemas.microsoft.com/office/drawing/2014/main" id="{0E105A94-ABF4-4721-BDAB-2246A9C72F1E}"/>
+                <a16:creationId xmlns:a16="http://schemas.microsoft.com/office/drawing/2014/main" id="{3749138C-B926-4695-A46F-B71A416BD034}"/>
               </a:ext>
             </a:extLst>
           </p:cNvPr>
@@ -7571,7 +7571,7 @@
     </p:spTree>
     <p:extLst>
       <p:ext uri="{BB962C8B-B14F-4D97-AF65-F5344CB8AC3E}">
-        <p14:creationId xmlns:p14="http://schemas.microsoft.com/office/powerpoint/2010/main" val="150002614"/>
+        <p14:creationId xmlns:p14="http://schemas.microsoft.com/office/powerpoint/2010/main" val="1839767209"/>
       </p:ext>
     </p:extLst>
   </p:cSld>
@@ -7769,10 +7769,10 @@
       </p:grpSpPr>
       <p:sp>
         <p:nvSpPr>
-          <p:cNvPr id="23" name="">
-            <a:extLst xmlns:a="http://schemas.openxmlformats.org/drawingml/2006/main">
-              <a:ext uri="{FF2B5EF4-FFF2-40B4-BE49-F238E27FC236}">
-                <a16:creationId xmlns:a16="http://schemas.microsoft.com/office/drawing/2014/main" id="{361882C9-7599-4D06-A87A-C0AFA0BD7A17}"/>
+          <p:cNvPr id="26" name="">
+            <a:extLst xmlns:a="http://schemas.openxmlformats.org/drawingml/2006/main">
+              <a:ext uri="{FF2B5EF4-FFF2-40B4-BE49-F238E27FC236}">
+                <a16:creationId xmlns:a16="http://schemas.microsoft.com/office/drawing/2014/main" id="{46546773-D64B-451A-A867-06F0F8FE2852}"/>
               </a:ext>
             </a:extLst>
           </p:cNvPr>
@@ -7804,7 +7804,7 @@
           <p:cNvPr id="2" name="">
             <a:extLst xmlns:a="http://schemas.openxmlformats.org/drawingml/2006/main">
               <a:ext uri="{FF2B5EF4-FFF2-40B4-BE49-F238E27FC236}">
-                <a16:creationId xmlns:a16="http://schemas.microsoft.com/office/drawing/2014/main" id="{45007B00-9D67-4D3A-BC36-A8B4F3D4D1FC}"/>
+                <a16:creationId xmlns:a16="http://schemas.microsoft.com/office/drawing/2014/main" id="{1D58BE4A-A745-4B0C-89DC-88A2D68B9ED7}"/>
               </a:ext>
             </a:extLst>
           </p:cNvPr>
@@ -7861,7 +7861,7 @@
           <p:cNvPr id="3" name="">
             <a:extLst xmlns:a="http://schemas.openxmlformats.org/drawingml/2006/main">
               <a:ext uri="{FF2B5EF4-FFF2-40B4-BE49-F238E27FC236}">
-                <a16:creationId xmlns:a16="http://schemas.microsoft.com/office/drawing/2014/main" id="{BD9EAF79-2AF3-4BDB-87A6-53B67549CADA}"/>
+                <a16:creationId xmlns:a16="http://schemas.microsoft.com/office/drawing/2014/main" id="{45D5B668-C101-4AD8-830E-F73041A8B1E7}"/>
               </a:ext>
             </a:extLst>
           </p:cNvPr>
@@ -7893,7 +7893,7 @@
           <p:cNvPr id="4" name="">
             <a:extLst xmlns:a="http://schemas.openxmlformats.org/drawingml/2006/main">
               <a:ext uri="{FF2B5EF4-FFF2-40B4-BE49-F238E27FC236}">
-                <a16:creationId xmlns:a16="http://schemas.microsoft.com/office/drawing/2014/main" id="{141812D4-9876-4A0D-8EFD-ED9B20B2E79F}"/>
+                <a16:creationId xmlns:a16="http://schemas.microsoft.com/office/drawing/2014/main" id="{61A4C16B-2247-436E-90C8-2089301C2856}"/>
               </a:ext>
             </a:extLst>
           </p:cNvPr>
@@ -7950,7 +7950,7 @@
           <p:cNvPr id="5" name="">
             <a:extLst xmlns:a="http://schemas.openxmlformats.org/drawingml/2006/main">
               <a:ext uri="{FF2B5EF4-FFF2-40B4-BE49-F238E27FC236}">
-                <a16:creationId xmlns:a16="http://schemas.microsoft.com/office/drawing/2014/main" id="{C76C729C-D3C0-472E-B4DB-17B3DF4E92BA}"/>
+                <a16:creationId xmlns:a16="http://schemas.microsoft.com/office/drawing/2014/main" id="{0033718C-6E3C-4607-A4C8-B3E33EBF63D8}"/>
               </a:ext>
             </a:extLst>
           </p:cNvPr>
@@ -8007,7 +8007,7 @@
           <p:cNvPr id="6" name="">
             <a:extLst xmlns:a="http://schemas.openxmlformats.org/drawingml/2006/main">
               <a:ext uri="{FF2B5EF4-FFF2-40B4-BE49-F238E27FC236}">
-                <a16:creationId xmlns:a16="http://schemas.microsoft.com/office/drawing/2014/main" id="{AD294278-DA42-4A47-9581-BC217D2E1653}"/>
+                <a16:creationId xmlns:a16="http://schemas.microsoft.com/office/drawing/2014/main" id="{268E9F84-7DDA-4006-A1C8-E8F38EF89C6C}"/>
               </a:ext>
             </a:extLst>
           </p:cNvPr>
@@ -8064,7 +8064,7 @@
           <p:cNvPr id="7" name="">
             <a:extLst xmlns:a="http://schemas.openxmlformats.org/drawingml/2006/main">
               <a:ext uri="{FF2B5EF4-FFF2-40B4-BE49-F238E27FC236}">
-                <a16:creationId xmlns:a16="http://schemas.microsoft.com/office/drawing/2014/main" id="{0DCE3067-BCF9-4D6C-BF27-BB066C823A23}"/>
+                <a16:creationId xmlns:a16="http://schemas.microsoft.com/office/drawing/2014/main" id="{B28AA60A-6DE4-40B2-87FA-C043EABC9461}"/>
               </a:ext>
             </a:extLst>
           </p:cNvPr>
@@ -8096,7 +8096,7 @@
           <p:cNvPr id="8" name="">
             <a:extLst xmlns:a="http://schemas.openxmlformats.org/drawingml/2006/main">
               <a:ext uri="{FF2B5EF4-FFF2-40B4-BE49-F238E27FC236}">
-                <a16:creationId xmlns:a16="http://schemas.microsoft.com/office/drawing/2014/main" id="{68E2AFD4-5447-4822-A4EA-A5DC0AA1EF97}"/>
+                <a16:creationId xmlns:a16="http://schemas.microsoft.com/office/drawing/2014/main" id="{39BE6E95-3A39-40F1-8306-A1868B4B0527}"/>
               </a:ext>
             </a:extLst>
           </p:cNvPr>
@@ -8153,7 +8153,7 @@
           <p:cNvPr id="9" name="">
             <a:extLst xmlns:a="http://schemas.openxmlformats.org/drawingml/2006/main">
               <a:ext uri="{FF2B5EF4-FFF2-40B4-BE49-F238E27FC236}">
-                <a16:creationId xmlns:a16="http://schemas.microsoft.com/office/drawing/2014/main" id="{65B099D1-6BF2-438C-8477-2D70E511AA43}"/>
+                <a16:creationId xmlns:a16="http://schemas.microsoft.com/office/drawing/2014/main" id="{D95512F1-2F92-45B7-8869-EA36A929C5E5}"/>
               </a:ext>
             </a:extLst>
           </p:cNvPr>
@@ -8210,19 +8210,19 @@
           <p:cNvPr id="10" name="">
             <a:extLst xmlns:a="http://schemas.openxmlformats.org/drawingml/2006/main">
               <a:ext uri="{FF2B5EF4-FFF2-40B4-BE49-F238E27FC236}">
-                <a16:creationId xmlns:a16="http://schemas.microsoft.com/office/drawing/2014/main" id="{0855311A-0EA2-4B70-B1A0-22041B0E729B}"/>
-              </a:ext>
-            </a:extLst>
-          </p:cNvPr>
-          <p:cNvSpPr>
-            <a:spLocks xmlns:a="http://schemas.openxmlformats.org/drawingml/2006/main" noGrp="1"/>
-          </p:cNvSpPr>
-          <p:nvPr/>
-        </p:nvSpPr>
-        <p:spPr>
-          <a:xfrm xmlns:a="http://schemas.openxmlformats.org/drawingml/2006/main">
-            <a:off x="914400" y="1257300"/>
-            <a:ext cx="10363200" cy="781050"/>
+                <a16:creationId xmlns:a16="http://schemas.microsoft.com/office/drawing/2014/main" id="{4D431B75-9277-41DE-9AF5-999C822179C6}"/>
+              </a:ext>
+            </a:extLst>
+          </p:cNvPr>
+          <p:cNvSpPr>
+            <a:spLocks xmlns:a="http://schemas.openxmlformats.org/drawingml/2006/main" noGrp="1"/>
+          </p:cNvSpPr>
+          <p:nvPr/>
+        </p:nvSpPr>
+        <p:spPr>
+          <a:xfrm xmlns:a="http://schemas.openxmlformats.org/drawingml/2006/main">
+            <a:off x="857250" y="1219200"/>
+            <a:ext cx="10477500" cy="742950"/>
           </a:xfrm>
           <a:prstGeom xmlns:a="http://schemas.openxmlformats.org/drawingml/2006/main" prst="rect">
             <a:avLst/>
@@ -8239,7 +8239,7 @@
           <a:lstStyle xmlns:a="http://schemas.openxmlformats.org/drawingml/2006/main"/>
           <a:p xmlns:a="http://schemas.openxmlformats.org/drawingml/2006/main">
             <a:pPr algn="ctr">
-              <a:defRPr sz="2175" b="1">
+              <a:defRPr sz="2100" b="1">
                 <a:solidFill>
                   <a:srgbClr val="17253A"/>
                 </a:solidFill>
@@ -8249,7 +8249,7 @@
               </a:defRPr>
             </a:pPr>
             <a:r>
-              <a:rPr sz="2175" b="1">
+              <a:rPr sz="2100" b="1">
                 <a:solidFill>
                   <a:srgbClr val="17253A"/>
                 </a:solidFill>
@@ -8267,28 +8267,30 @@
           <p:cNvPr id="11" name="">
             <a:extLst xmlns:a="http://schemas.openxmlformats.org/drawingml/2006/main">
               <a:ext uri="{FF2B5EF4-FFF2-40B4-BE49-F238E27FC236}">
-                <a16:creationId xmlns:a16="http://schemas.microsoft.com/office/drawing/2014/main" id="{ABF43773-3282-4FB3-87FF-E64EF270276F}"/>
-              </a:ext>
-            </a:extLst>
-          </p:cNvPr>
-          <p:cNvSpPr>
-            <a:spLocks xmlns:a="http://schemas.openxmlformats.org/drawingml/2006/main" noGrp="1"/>
-          </p:cNvSpPr>
-          <p:nvPr/>
-        </p:nvSpPr>
-        <p:spPr>
-          <a:xfrm xmlns:a="http://schemas.openxmlformats.org/drawingml/2006/main">
-            <a:off x="1000125" y="2247900"/>
-            <a:ext cx="476250" cy="476250"/>
-          </a:xfrm>
-          <a:prstGeom xmlns:a="http://schemas.openxmlformats.org/drawingml/2006/main" prst="ellipse">
+                <a16:creationId xmlns:a16="http://schemas.microsoft.com/office/drawing/2014/main" id="{1C367234-9227-4F2F-B996-5783C2E4E854}"/>
+              </a:ext>
+            </a:extLst>
+          </p:cNvPr>
+          <p:cNvSpPr>
+            <a:spLocks xmlns:a="http://schemas.openxmlformats.org/drawingml/2006/main" noGrp="1"/>
+          </p:cNvSpPr>
+          <p:nvPr/>
+        </p:nvSpPr>
+        <p:spPr>
+          <a:xfrm xmlns:a="http://schemas.openxmlformats.org/drawingml/2006/main">
+            <a:off x="971550" y="2124075"/>
+            <a:ext cx="38100" cy="3524250"/>
+          </a:xfrm>
+          <a:prstGeom xmlns:a="http://schemas.openxmlformats.org/drawingml/2006/main" prst="rect">
             <a:avLst/>
           </a:prstGeom>
           <a:solidFill xmlns:a="http://schemas.openxmlformats.org/drawingml/2006/main">
-            <a:srgbClr val="18324A"/>
+            <a:srgbClr val="2C6E73"/>
           </a:solidFill>
           <a:ln xmlns:a="http://schemas.openxmlformats.org/drawingml/2006/main" w="0">
-            <a:noFill/>
+            <a:solidFill>
+              <a:srgbClr val="2C6E73"/>
+            </a:solidFill>
           </a:ln>
         </p:spPr>
       </p:sp>
@@ -8297,19 +8299,19 @@
           <p:cNvPr id="12" name="">
             <a:extLst xmlns:a="http://schemas.openxmlformats.org/drawingml/2006/main">
               <a:ext uri="{FF2B5EF4-FFF2-40B4-BE49-F238E27FC236}">
-                <a16:creationId xmlns:a16="http://schemas.microsoft.com/office/drawing/2014/main" id="{383B8D9C-7D46-4541-B005-784D89244DF6}"/>
-              </a:ext>
-            </a:extLst>
-          </p:cNvPr>
-          <p:cNvSpPr>
-            <a:spLocks xmlns:a="http://schemas.openxmlformats.org/drawingml/2006/main" noGrp="1"/>
-          </p:cNvSpPr>
-          <p:nvPr/>
-        </p:nvSpPr>
-        <p:spPr>
-          <a:xfrm xmlns:a="http://schemas.openxmlformats.org/drawingml/2006/main">
-            <a:off x="1000125" y="2276475"/>
-            <a:ext cx="476250" cy="419100"/>
+                <a16:creationId xmlns:a16="http://schemas.microsoft.com/office/drawing/2014/main" id="{B926554F-40EA-4FB1-910E-65E5B83BF7F4}"/>
+              </a:ext>
+            </a:extLst>
+          </p:cNvPr>
+          <p:cNvSpPr>
+            <a:spLocks xmlns:a="http://schemas.openxmlformats.org/drawingml/2006/main" noGrp="1"/>
+          </p:cNvSpPr>
+          <p:nvPr/>
+        </p:nvSpPr>
+        <p:spPr>
+          <a:xfrm xmlns:a="http://schemas.openxmlformats.org/drawingml/2006/main">
+            <a:off x="1162050" y="2200275"/>
+            <a:ext cx="400050" cy="400050"/>
           </a:xfrm>
           <a:prstGeom xmlns:a="http://schemas.openxmlformats.org/drawingml/2006/main" prst="rect">
             <a:avLst/>
@@ -8326,9 +8328,9 @@
           <a:lstStyle xmlns:a="http://schemas.openxmlformats.org/drawingml/2006/main"/>
           <a:p xmlns:a="http://schemas.openxmlformats.org/drawingml/2006/main">
             <a:pPr algn="ctr">
-              <a:defRPr sz="1350" b="1">
-                <a:solidFill>
-                  <a:srgbClr val="FFFFFF"/>
+              <a:defRPr sz="1125" b="1">
+                <a:solidFill>
+                  <a:srgbClr val="2C6E73"/>
                 </a:solidFill>
                 <a:latin typeface="Arial"/>
                 <a:ea typeface="Arial"/>
@@ -8336,9 +8338,9 @@
               </a:defRPr>
             </a:pPr>
             <a:r>
-              <a:rPr sz="1350" b="1">
-                <a:solidFill>
-                  <a:srgbClr val="FFFFFF"/>
+              <a:rPr sz="1125" b="1">
+                <a:solidFill>
+                  <a:srgbClr val="2C6E73"/>
                 </a:solidFill>
                 <a:latin typeface="Arial"/>
                 <a:ea typeface="Arial"/>
@@ -8354,19 +8356,19 @@
           <p:cNvPr id="13" name="">
             <a:extLst xmlns:a="http://schemas.openxmlformats.org/drawingml/2006/main">
               <a:ext uri="{FF2B5EF4-FFF2-40B4-BE49-F238E27FC236}">
-                <a16:creationId xmlns:a16="http://schemas.microsoft.com/office/drawing/2014/main" id="{2A2622C1-0578-4DE4-AD5B-91E812AE35CF}"/>
-              </a:ext>
-            </a:extLst>
-          </p:cNvPr>
-          <p:cNvSpPr>
-            <a:spLocks xmlns:a="http://schemas.openxmlformats.org/drawingml/2006/main" noGrp="1"/>
-          </p:cNvSpPr>
-          <p:nvPr/>
-        </p:nvSpPr>
-        <p:spPr>
-          <a:xfrm xmlns:a="http://schemas.openxmlformats.org/drawingml/2006/main">
-            <a:off x="1714500" y="2181225"/>
-            <a:ext cx="9429750" cy="609600"/>
+                <a16:creationId xmlns:a16="http://schemas.microsoft.com/office/drawing/2014/main" id="{6015E2E2-5AB5-48CD-A29A-450B8F30E587}"/>
+              </a:ext>
+            </a:extLst>
+          </p:cNvPr>
+          <p:cNvSpPr>
+            <a:spLocks xmlns:a="http://schemas.openxmlformats.org/drawingml/2006/main" noGrp="1"/>
+          </p:cNvSpPr>
+          <p:nvPr/>
+        </p:nvSpPr>
+        <p:spPr>
+          <a:xfrm xmlns:a="http://schemas.openxmlformats.org/drawingml/2006/main">
+            <a:off x="1714500" y="2114550"/>
+            <a:ext cx="9525000" cy="638175"/>
           </a:xfrm>
           <a:prstGeom xmlns:a="http://schemas.openxmlformats.org/drawingml/2006/main" prst="rect">
             <a:avLst/>
@@ -8383,7 +8385,7 @@
           <a:lstStyle xmlns:a="http://schemas.openxmlformats.org/drawingml/2006/main"/>
           <a:p xmlns:a="http://schemas.openxmlformats.org/drawingml/2006/main">
             <a:pPr algn="l">
-              <a:defRPr sz="1500" b="0">
+              <a:defRPr sz="1575" b="0">
                 <a:solidFill>
                   <a:srgbClr val="17253A"/>
                 </a:solidFill>
@@ -8393,7 +8395,7 @@
               </a:defRPr>
             </a:pPr>
             <a:r>
-              <a:rPr sz="1500" b="0">
+              <a:rPr sz="1575" b="0">
                 <a:solidFill>
                   <a:srgbClr val="17253A"/>
                 </a:solidFill>
@@ -8401,7 +8403,7 @@
                 <a:ea typeface="Arial"/>
                 <a:cs typeface="Arial"/>
               </a:rPr>
-              <a:t>Identify the structure: Identify the multiplicative scale or total number of ratio parts.</a:t>
+              <a:t>7 cm × scale factor 3.5</a:t>
             </a:r>
           </a:p>
         </p:txBody>
@@ -8411,28 +8413,30 @@
           <p:cNvPr id="14" name="">
             <a:extLst xmlns:a="http://schemas.openxmlformats.org/drawingml/2006/main">
               <a:ext uri="{FF2B5EF4-FFF2-40B4-BE49-F238E27FC236}">
-                <a16:creationId xmlns:a16="http://schemas.microsoft.com/office/drawing/2014/main" id="{B08B4D20-D07B-493D-BC9B-02ED9C3E693F}"/>
-              </a:ext>
-            </a:extLst>
-          </p:cNvPr>
-          <p:cNvSpPr>
-            <a:spLocks xmlns:a="http://schemas.openxmlformats.org/drawingml/2006/main" noGrp="1"/>
-          </p:cNvSpPr>
-          <p:nvPr/>
-        </p:nvSpPr>
-        <p:spPr>
-          <a:xfrm xmlns:a="http://schemas.openxmlformats.org/drawingml/2006/main">
-            <a:off x="1000125" y="2990850"/>
-            <a:ext cx="476250" cy="476250"/>
-          </a:xfrm>
-          <a:prstGeom xmlns:a="http://schemas.openxmlformats.org/drawingml/2006/main" prst="ellipse">
+                <a16:creationId xmlns:a16="http://schemas.microsoft.com/office/drawing/2014/main" id="{A5672E0C-B383-4DB8-9635-5F7CF203AD46}"/>
+              </a:ext>
+            </a:extLst>
+          </p:cNvPr>
+          <p:cNvSpPr>
+            <a:spLocks xmlns:a="http://schemas.openxmlformats.org/drawingml/2006/main" noGrp="1"/>
+          </p:cNvSpPr>
+          <p:nvPr/>
+        </p:nvSpPr>
+        <p:spPr>
+          <a:xfrm xmlns:a="http://schemas.openxmlformats.org/drawingml/2006/main">
+            <a:off x="1714500" y="2771775"/>
+            <a:ext cx="9334500" cy="9525"/>
+          </a:xfrm>
+          <a:prstGeom xmlns:a="http://schemas.openxmlformats.org/drawingml/2006/main" prst="rect">
             <a:avLst/>
           </a:prstGeom>
           <a:solidFill xmlns:a="http://schemas.openxmlformats.org/drawingml/2006/main">
-            <a:srgbClr val="2C6E73"/>
+            <a:srgbClr val="D9E0E6"/>
           </a:solidFill>
           <a:ln xmlns:a="http://schemas.openxmlformats.org/drawingml/2006/main" w="0">
-            <a:noFill/>
+            <a:solidFill>
+              <a:srgbClr val="D9E0E6"/>
+            </a:solidFill>
           </a:ln>
         </p:spPr>
       </p:sp>
@@ -8441,19 +8445,19 @@
           <p:cNvPr id="15" name="">
             <a:extLst xmlns:a="http://schemas.openxmlformats.org/drawingml/2006/main">
               <a:ext uri="{FF2B5EF4-FFF2-40B4-BE49-F238E27FC236}">
-                <a16:creationId xmlns:a16="http://schemas.microsoft.com/office/drawing/2014/main" id="{E4C4788B-4946-4E30-961E-894B9CC46B5A}"/>
-              </a:ext>
-            </a:extLst>
-          </p:cNvPr>
-          <p:cNvSpPr>
-            <a:spLocks xmlns:a="http://schemas.openxmlformats.org/drawingml/2006/main" noGrp="1"/>
-          </p:cNvSpPr>
-          <p:nvPr/>
-        </p:nvSpPr>
-        <p:spPr>
-          <a:xfrm xmlns:a="http://schemas.openxmlformats.org/drawingml/2006/main">
-            <a:off x="1000125" y="3019425"/>
-            <a:ext cx="476250" cy="419100"/>
+                <a16:creationId xmlns:a16="http://schemas.microsoft.com/office/drawing/2014/main" id="{DD8E3F00-3A00-4E27-93E5-FA9BB7876E27}"/>
+              </a:ext>
+            </a:extLst>
+          </p:cNvPr>
+          <p:cNvSpPr>
+            <a:spLocks xmlns:a="http://schemas.openxmlformats.org/drawingml/2006/main" noGrp="1"/>
+          </p:cNvSpPr>
+          <p:nvPr/>
+        </p:nvSpPr>
+        <p:spPr>
+          <a:xfrm xmlns:a="http://schemas.openxmlformats.org/drawingml/2006/main">
+            <a:off x="1162050" y="2905125"/>
+            <a:ext cx="400050" cy="400050"/>
           </a:xfrm>
           <a:prstGeom xmlns:a="http://schemas.openxmlformats.org/drawingml/2006/main" prst="rect">
             <a:avLst/>
@@ -8470,9 +8474,9 @@
           <a:lstStyle xmlns:a="http://schemas.openxmlformats.org/drawingml/2006/main"/>
           <a:p xmlns:a="http://schemas.openxmlformats.org/drawingml/2006/main">
             <a:pPr algn="ctr">
-              <a:defRPr sz="1350" b="1">
-                <a:solidFill>
-                  <a:srgbClr val="FFFFFF"/>
+              <a:defRPr sz="1125" b="1">
+                <a:solidFill>
+                  <a:srgbClr val="2C6E73"/>
                 </a:solidFill>
                 <a:latin typeface="Arial"/>
                 <a:ea typeface="Arial"/>
@@ -8480,9 +8484,9 @@
               </a:defRPr>
             </a:pPr>
             <a:r>
-              <a:rPr sz="1350" b="1">
-                <a:solidFill>
-                  <a:srgbClr val="FFFFFF"/>
+              <a:rPr sz="1125" b="1">
+                <a:solidFill>
+                  <a:srgbClr val="2C6E73"/>
                 </a:solidFill>
                 <a:latin typeface="Arial"/>
                 <a:ea typeface="Arial"/>
@@ -8498,19 +8502,19 @@
           <p:cNvPr id="16" name="">
             <a:extLst xmlns:a="http://schemas.openxmlformats.org/drawingml/2006/main">
               <a:ext uri="{FF2B5EF4-FFF2-40B4-BE49-F238E27FC236}">
-                <a16:creationId xmlns:a16="http://schemas.microsoft.com/office/drawing/2014/main" id="{F22DC2A6-5750-4DE4-9DFB-6ED27D5E2B6E}"/>
-              </a:ext>
-            </a:extLst>
-          </p:cNvPr>
-          <p:cNvSpPr>
-            <a:spLocks xmlns:a="http://schemas.openxmlformats.org/drawingml/2006/main" noGrp="1"/>
-          </p:cNvSpPr>
-          <p:nvPr/>
-        </p:nvSpPr>
-        <p:spPr>
-          <a:xfrm xmlns:a="http://schemas.openxmlformats.org/drawingml/2006/main">
-            <a:off x="1714500" y="2924175"/>
-            <a:ext cx="9429750" cy="609600"/>
+                <a16:creationId xmlns:a16="http://schemas.microsoft.com/office/drawing/2014/main" id="{C0043524-2AA8-4DC4-AF8F-2BB8A86C9647}"/>
+              </a:ext>
+            </a:extLst>
+          </p:cNvPr>
+          <p:cNvSpPr>
+            <a:spLocks xmlns:a="http://schemas.openxmlformats.org/drawingml/2006/main" noGrp="1"/>
+          </p:cNvSpPr>
+          <p:nvPr/>
+        </p:nvSpPr>
+        <p:spPr>
+          <a:xfrm xmlns:a="http://schemas.openxmlformats.org/drawingml/2006/main">
+            <a:off x="1714500" y="2819400"/>
+            <a:ext cx="9525000" cy="638175"/>
           </a:xfrm>
           <a:prstGeom xmlns:a="http://schemas.openxmlformats.org/drawingml/2006/main" prst="rect">
             <a:avLst/>
@@ -8527,7 +8531,7 @@
           <a:lstStyle xmlns:a="http://schemas.openxmlformats.org/drawingml/2006/main"/>
           <a:p xmlns:a="http://schemas.openxmlformats.org/drawingml/2006/main">
             <a:pPr algn="l">
-              <a:defRPr sz="1500" b="0">
+              <a:defRPr sz="1575" b="0">
                 <a:solidFill>
                   <a:srgbClr val="17253A"/>
                 </a:solidFill>
@@ -8537,7 +8541,7 @@
               </a:defRPr>
             </a:pPr>
             <a:r>
-              <a:rPr sz="1500" b="0">
+              <a:rPr sz="1575" b="0">
                 <a:solidFill>
                   <a:srgbClr val="17253A"/>
                 </a:solidFill>
@@ -8545,7 +8549,7 @@
                 <a:ea typeface="Arial"/>
                 <a:cs typeface="Arial"/>
               </a:rPr>
-              <a:t>Set up the method: Apply the factor consistently or find the value of one part.</a:t>
+              <a:t>7 × 3.5</a:t>
             </a:r>
           </a:p>
         </p:txBody>
@@ -8555,28 +8559,30 @@
           <p:cNvPr id="17" name="">
             <a:extLst xmlns:a="http://schemas.openxmlformats.org/drawingml/2006/main">
               <a:ext uri="{FF2B5EF4-FFF2-40B4-BE49-F238E27FC236}">
-                <a16:creationId xmlns:a16="http://schemas.microsoft.com/office/drawing/2014/main" id="{1446E9E0-379A-4D07-9B4E-06877019E2F7}"/>
-              </a:ext>
-            </a:extLst>
-          </p:cNvPr>
-          <p:cNvSpPr>
-            <a:spLocks xmlns:a="http://schemas.openxmlformats.org/drawingml/2006/main" noGrp="1"/>
-          </p:cNvSpPr>
-          <p:nvPr/>
-        </p:nvSpPr>
-        <p:spPr>
-          <a:xfrm xmlns:a="http://schemas.openxmlformats.org/drawingml/2006/main">
-            <a:off x="1000125" y="3733800"/>
-            <a:ext cx="476250" cy="476250"/>
-          </a:xfrm>
-          <a:prstGeom xmlns:a="http://schemas.openxmlformats.org/drawingml/2006/main" prst="ellipse">
+                <a16:creationId xmlns:a16="http://schemas.microsoft.com/office/drawing/2014/main" id="{7D6A8459-158A-42BA-8A0D-75A32DF3D5FD}"/>
+              </a:ext>
+            </a:extLst>
+          </p:cNvPr>
+          <p:cNvSpPr>
+            <a:spLocks xmlns:a="http://schemas.openxmlformats.org/drawingml/2006/main" noGrp="1"/>
+          </p:cNvSpPr>
+          <p:nvPr/>
+        </p:nvSpPr>
+        <p:spPr>
+          <a:xfrm xmlns:a="http://schemas.openxmlformats.org/drawingml/2006/main">
+            <a:off x="1714500" y="3476625"/>
+            <a:ext cx="9334500" cy="9525"/>
+          </a:xfrm>
+          <a:prstGeom xmlns:a="http://schemas.openxmlformats.org/drawingml/2006/main" prst="rect">
             <a:avLst/>
           </a:prstGeom>
           <a:solidFill xmlns:a="http://schemas.openxmlformats.org/drawingml/2006/main">
-            <a:srgbClr val="2C6E73"/>
+            <a:srgbClr val="D9E0E6"/>
           </a:solidFill>
           <a:ln xmlns:a="http://schemas.openxmlformats.org/drawingml/2006/main" w="0">
-            <a:noFill/>
+            <a:solidFill>
+              <a:srgbClr val="D9E0E6"/>
+            </a:solidFill>
           </a:ln>
         </p:spPr>
       </p:sp>
@@ -8585,19 +8591,19 @@
           <p:cNvPr id="18" name="">
             <a:extLst xmlns:a="http://schemas.openxmlformats.org/drawingml/2006/main">
               <a:ext uri="{FF2B5EF4-FFF2-40B4-BE49-F238E27FC236}">
-                <a16:creationId xmlns:a16="http://schemas.microsoft.com/office/drawing/2014/main" id="{D35D1135-2811-4836-8C05-549BC94B7BB6}"/>
-              </a:ext>
-            </a:extLst>
-          </p:cNvPr>
-          <p:cNvSpPr>
-            <a:spLocks xmlns:a="http://schemas.openxmlformats.org/drawingml/2006/main" noGrp="1"/>
-          </p:cNvSpPr>
-          <p:nvPr/>
-        </p:nvSpPr>
-        <p:spPr>
-          <a:xfrm xmlns:a="http://schemas.openxmlformats.org/drawingml/2006/main">
-            <a:off x="1000125" y="3762375"/>
-            <a:ext cx="476250" cy="419100"/>
+                <a16:creationId xmlns:a16="http://schemas.microsoft.com/office/drawing/2014/main" id="{5008650C-5C14-4621-A825-AF75BBF95FE3}"/>
+              </a:ext>
+            </a:extLst>
+          </p:cNvPr>
+          <p:cNvSpPr>
+            <a:spLocks xmlns:a="http://schemas.openxmlformats.org/drawingml/2006/main" noGrp="1"/>
+          </p:cNvSpPr>
+          <p:nvPr/>
+        </p:nvSpPr>
+        <p:spPr>
+          <a:xfrm xmlns:a="http://schemas.openxmlformats.org/drawingml/2006/main">
+            <a:off x="1162050" y="3609975"/>
+            <a:ext cx="400050" cy="400050"/>
           </a:xfrm>
           <a:prstGeom xmlns:a="http://schemas.openxmlformats.org/drawingml/2006/main" prst="rect">
             <a:avLst/>
@@ -8614,9 +8620,9 @@
           <a:lstStyle xmlns:a="http://schemas.openxmlformats.org/drawingml/2006/main"/>
           <a:p xmlns:a="http://schemas.openxmlformats.org/drawingml/2006/main">
             <a:pPr algn="ctr">
-              <a:defRPr sz="1350" b="1">
-                <a:solidFill>
-                  <a:srgbClr val="FFFFFF"/>
+              <a:defRPr sz="1125" b="1">
+                <a:solidFill>
+                  <a:srgbClr val="2C6E73"/>
                 </a:solidFill>
                 <a:latin typeface="Arial"/>
                 <a:ea typeface="Arial"/>
@@ -8624,9 +8630,9 @@
               </a:defRPr>
             </a:pPr>
             <a:r>
-              <a:rPr sz="1350" b="1">
-                <a:solidFill>
-                  <a:srgbClr val="FFFFFF"/>
+              <a:rPr sz="1125" b="1">
+                <a:solidFill>
+                  <a:srgbClr val="2C6E73"/>
                 </a:solidFill>
                 <a:latin typeface="Arial"/>
                 <a:ea typeface="Arial"/>
@@ -8642,19 +8648,19 @@
           <p:cNvPr id="19" name="">
             <a:extLst xmlns:a="http://schemas.openxmlformats.org/drawingml/2006/main">
               <a:ext uri="{FF2B5EF4-FFF2-40B4-BE49-F238E27FC236}">
-                <a16:creationId xmlns:a16="http://schemas.microsoft.com/office/drawing/2014/main" id="{CB12CEAA-0211-498F-8DC1-D5A09AF23830}"/>
-              </a:ext>
-            </a:extLst>
-          </p:cNvPr>
-          <p:cNvSpPr>
-            <a:spLocks xmlns:a="http://schemas.openxmlformats.org/drawingml/2006/main" noGrp="1"/>
-          </p:cNvSpPr>
-          <p:nvPr/>
-        </p:nvSpPr>
-        <p:spPr>
-          <a:xfrm xmlns:a="http://schemas.openxmlformats.org/drawingml/2006/main">
-            <a:off x="1714500" y="3667125"/>
-            <a:ext cx="9429750" cy="609600"/>
+                <a16:creationId xmlns:a16="http://schemas.microsoft.com/office/drawing/2014/main" id="{1DAF61D7-B74A-424E-B0F1-542B5D7C8AAD}"/>
+              </a:ext>
+            </a:extLst>
+          </p:cNvPr>
+          <p:cNvSpPr>
+            <a:spLocks xmlns:a="http://schemas.openxmlformats.org/drawingml/2006/main" noGrp="1"/>
+          </p:cNvSpPr>
+          <p:nvPr/>
+        </p:nvSpPr>
+        <p:spPr>
+          <a:xfrm xmlns:a="http://schemas.openxmlformats.org/drawingml/2006/main">
+            <a:off x="1714500" y="3524250"/>
+            <a:ext cx="9525000" cy="638175"/>
           </a:xfrm>
           <a:prstGeom xmlns:a="http://schemas.openxmlformats.org/drawingml/2006/main" prst="rect">
             <a:avLst/>
@@ -8671,7 +8677,7 @@
           <a:lstStyle xmlns:a="http://schemas.openxmlformats.org/drawingml/2006/main"/>
           <a:p xmlns:a="http://schemas.openxmlformats.org/drawingml/2006/main">
             <a:pPr algn="l">
-              <a:defRPr sz="1500" b="0">
+              <a:defRPr sz="1575" b="0">
                 <a:solidFill>
                   <a:srgbClr val="17253A"/>
                 </a:solidFill>
@@ -8681,7 +8687,7 @@
               </a:defRPr>
             </a:pPr>
             <a:r>
-              <a:rPr sz="1500" b="0">
+              <a:rPr sz="1575" b="0">
                 <a:solidFill>
                   <a:srgbClr val="17253A"/>
                 </a:solidFill>
@@ -8689,7 +8695,7 @@
                 <a:ea typeface="Arial"/>
                 <a:cs typeface="Arial"/>
               </a:rPr>
-              <a:t>Complete the calculation: 24.5 cm.</a:t>
+              <a:t>7 × 3 + 7 × 0.5</a:t>
             </a:r>
           </a:p>
         </p:txBody>
@@ -8699,28 +8705,30 @@
           <p:cNvPr id="20" name="">
             <a:extLst xmlns:a="http://schemas.openxmlformats.org/drawingml/2006/main">
               <a:ext uri="{FF2B5EF4-FFF2-40B4-BE49-F238E27FC236}">
-                <a16:creationId xmlns:a16="http://schemas.microsoft.com/office/drawing/2014/main" id="{0C37EE57-9817-490E-93F9-B90DB9353C57}"/>
-              </a:ext>
-            </a:extLst>
-          </p:cNvPr>
-          <p:cNvSpPr>
-            <a:spLocks xmlns:a="http://schemas.openxmlformats.org/drawingml/2006/main" noGrp="1"/>
-          </p:cNvSpPr>
-          <p:nvPr/>
-        </p:nvSpPr>
-        <p:spPr>
-          <a:xfrm xmlns:a="http://schemas.openxmlformats.org/drawingml/2006/main">
-            <a:off x="1000125" y="4476750"/>
-            <a:ext cx="476250" cy="476250"/>
-          </a:xfrm>
-          <a:prstGeom xmlns:a="http://schemas.openxmlformats.org/drawingml/2006/main" prst="ellipse">
+                <a16:creationId xmlns:a16="http://schemas.microsoft.com/office/drawing/2014/main" id="{506C3104-90AC-4A5F-8B51-F5B601BDEA64}"/>
+              </a:ext>
+            </a:extLst>
+          </p:cNvPr>
+          <p:cNvSpPr>
+            <a:spLocks xmlns:a="http://schemas.openxmlformats.org/drawingml/2006/main" noGrp="1"/>
+          </p:cNvSpPr>
+          <p:nvPr/>
+        </p:nvSpPr>
+        <p:spPr>
+          <a:xfrm xmlns:a="http://schemas.openxmlformats.org/drawingml/2006/main">
+            <a:off x="1714500" y="4181475"/>
+            <a:ext cx="9334500" cy="9525"/>
+          </a:xfrm>
+          <a:prstGeom xmlns:a="http://schemas.openxmlformats.org/drawingml/2006/main" prst="rect">
             <a:avLst/>
           </a:prstGeom>
           <a:solidFill xmlns:a="http://schemas.openxmlformats.org/drawingml/2006/main">
-            <a:srgbClr val="2C6E73"/>
+            <a:srgbClr val="D9E0E6"/>
           </a:solidFill>
           <a:ln xmlns:a="http://schemas.openxmlformats.org/drawingml/2006/main" w="0">
-            <a:noFill/>
+            <a:solidFill>
+              <a:srgbClr val="D9E0E6"/>
+            </a:solidFill>
           </a:ln>
         </p:spPr>
       </p:sp>
@@ -8729,19 +8737,19 @@
           <p:cNvPr id="21" name="">
             <a:extLst xmlns:a="http://schemas.openxmlformats.org/drawingml/2006/main">
               <a:ext uri="{FF2B5EF4-FFF2-40B4-BE49-F238E27FC236}">
-                <a16:creationId xmlns:a16="http://schemas.microsoft.com/office/drawing/2014/main" id="{CFCE7454-AB0E-4709-A514-5F933ED0A6A0}"/>
-              </a:ext>
-            </a:extLst>
-          </p:cNvPr>
-          <p:cNvSpPr>
-            <a:spLocks xmlns:a="http://schemas.openxmlformats.org/drawingml/2006/main" noGrp="1"/>
-          </p:cNvSpPr>
-          <p:nvPr/>
-        </p:nvSpPr>
-        <p:spPr>
-          <a:xfrm xmlns:a="http://schemas.openxmlformats.org/drawingml/2006/main">
-            <a:off x="1000125" y="4505325"/>
-            <a:ext cx="476250" cy="419100"/>
+                <a16:creationId xmlns:a16="http://schemas.microsoft.com/office/drawing/2014/main" id="{400ABC60-E0EC-4FB4-810F-1AB51C84876C}"/>
+              </a:ext>
+            </a:extLst>
+          </p:cNvPr>
+          <p:cNvSpPr>
+            <a:spLocks xmlns:a="http://schemas.openxmlformats.org/drawingml/2006/main" noGrp="1"/>
+          </p:cNvSpPr>
+          <p:nvPr/>
+        </p:nvSpPr>
+        <p:spPr>
+          <a:xfrm xmlns:a="http://schemas.openxmlformats.org/drawingml/2006/main">
+            <a:off x="1162050" y="4314825"/>
+            <a:ext cx="400050" cy="400050"/>
           </a:xfrm>
           <a:prstGeom xmlns:a="http://schemas.openxmlformats.org/drawingml/2006/main" prst="rect">
             <a:avLst/>
@@ -8758,9 +8766,9 @@
           <a:lstStyle xmlns:a="http://schemas.openxmlformats.org/drawingml/2006/main"/>
           <a:p xmlns:a="http://schemas.openxmlformats.org/drawingml/2006/main">
             <a:pPr algn="ctr">
-              <a:defRPr sz="1350" b="1">
-                <a:solidFill>
-                  <a:srgbClr val="FFFFFF"/>
+              <a:defRPr sz="1125" b="1">
+                <a:solidFill>
+                  <a:srgbClr val="2C6E73"/>
                 </a:solidFill>
                 <a:latin typeface="Arial"/>
                 <a:ea typeface="Arial"/>
@@ -8768,9 +8776,9 @@
               </a:defRPr>
             </a:pPr>
             <a:r>
-              <a:rPr sz="1350" b="1">
-                <a:solidFill>
-                  <a:srgbClr val="FFFFFF"/>
+              <a:rPr sz="1125" b="1">
+                <a:solidFill>
+                  <a:srgbClr val="2C6E73"/>
                 </a:solidFill>
                 <a:latin typeface="Arial"/>
                 <a:ea typeface="Arial"/>
@@ -8786,19 +8794,19 @@
           <p:cNvPr id="22" name="">
             <a:extLst xmlns:a="http://schemas.openxmlformats.org/drawingml/2006/main">
               <a:ext uri="{FF2B5EF4-FFF2-40B4-BE49-F238E27FC236}">
-                <a16:creationId xmlns:a16="http://schemas.microsoft.com/office/drawing/2014/main" id="{11B14738-15C6-4D2D-B4F1-ABC543599DE6}"/>
-              </a:ext>
-            </a:extLst>
-          </p:cNvPr>
-          <p:cNvSpPr>
-            <a:spLocks xmlns:a="http://schemas.openxmlformats.org/drawingml/2006/main" noGrp="1"/>
-          </p:cNvSpPr>
-          <p:nvPr/>
-        </p:nvSpPr>
-        <p:spPr>
-          <a:xfrm xmlns:a="http://schemas.openxmlformats.org/drawingml/2006/main">
-            <a:off x="1714500" y="4410075"/>
-            <a:ext cx="9429750" cy="609600"/>
+                <a16:creationId xmlns:a16="http://schemas.microsoft.com/office/drawing/2014/main" id="{42AECD2D-B85E-44FA-8E7C-80C2ECADAF0F}"/>
+              </a:ext>
+            </a:extLst>
+          </p:cNvPr>
+          <p:cNvSpPr>
+            <a:spLocks xmlns:a="http://schemas.openxmlformats.org/drawingml/2006/main" noGrp="1"/>
+          </p:cNvSpPr>
+          <p:nvPr/>
+        </p:nvSpPr>
+        <p:spPr>
+          <a:xfrm xmlns:a="http://schemas.openxmlformats.org/drawingml/2006/main">
+            <a:off x="1714500" y="4229100"/>
+            <a:ext cx="9525000" cy="638175"/>
           </a:xfrm>
           <a:prstGeom xmlns:a="http://schemas.openxmlformats.org/drawingml/2006/main" prst="rect">
             <a:avLst/>
@@ -8815,9 +8823,9 @@
           <a:lstStyle xmlns:a="http://schemas.openxmlformats.org/drawingml/2006/main"/>
           <a:p xmlns:a="http://schemas.openxmlformats.org/drawingml/2006/main">
             <a:pPr algn="l">
-              <a:defRPr sz="1500" b="1">
-                <a:solidFill>
-                  <a:srgbClr val="2F785D"/>
+              <a:defRPr sz="1575" b="0">
+                <a:solidFill>
+                  <a:srgbClr val="17253A"/>
                 </a:solidFill>
                 <a:latin typeface="Arial"/>
                 <a:ea typeface="Arial"/>
@@ -8825,15 +8833,161 @@
               </a:defRPr>
             </a:pPr>
             <a:r>
-              <a:rPr sz="1500" b="1">
+              <a:rPr sz="1575" b="0">
+                <a:solidFill>
+                  <a:srgbClr val="17253A"/>
+                </a:solidFill>
+                <a:latin typeface="Arial"/>
+                <a:ea typeface="Arial"/>
+                <a:cs typeface="Arial"/>
+              </a:rPr>
+              <a:t>21 + 3.5</a:t>
+            </a:r>
+          </a:p>
+        </p:txBody>
+      </p:sp>
+      <p:sp>
+        <p:nvSpPr>
+          <p:cNvPr id="23" name="">
+            <a:extLst xmlns:a="http://schemas.openxmlformats.org/drawingml/2006/main">
+              <a:ext uri="{FF2B5EF4-FFF2-40B4-BE49-F238E27FC236}">
+                <a16:creationId xmlns:a16="http://schemas.microsoft.com/office/drawing/2014/main" id="{CC0E51DB-1FDE-4F77-B0F1-3A3497E4C9EE}"/>
+              </a:ext>
+            </a:extLst>
+          </p:cNvPr>
+          <p:cNvSpPr>
+            <a:spLocks xmlns:a="http://schemas.openxmlformats.org/drawingml/2006/main" noGrp="1"/>
+          </p:cNvSpPr>
+          <p:nvPr/>
+        </p:nvSpPr>
+        <p:spPr>
+          <a:xfrm xmlns:a="http://schemas.openxmlformats.org/drawingml/2006/main">
+            <a:off x="1714500" y="4886325"/>
+            <a:ext cx="9334500" cy="9525"/>
+          </a:xfrm>
+          <a:prstGeom xmlns:a="http://schemas.openxmlformats.org/drawingml/2006/main" prst="rect">
+            <a:avLst/>
+          </a:prstGeom>
+          <a:solidFill xmlns:a="http://schemas.openxmlformats.org/drawingml/2006/main">
+            <a:srgbClr val="D9E0E6"/>
+          </a:solidFill>
+          <a:ln xmlns:a="http://schemas.openxmlformats.org/drawingml/2006/main" w="0">
+            <a:solidFill>
+              <a:srgbClr val="D9E0E6"/>
+            </a:solidFill>
+          </a:ln>
+        </p:spPr>
+      </p:sp>
+      <p:sp>
+        <p:nvSpPr>
+          <p:cNvPr id="24" name="">
+            <a:extLst xmlns:a="http://schemas.openxmlformats.org/drawingml/2006/main">
+              <a:ext uri="{FF2B5EF4-FFF2-40B4-BE49-F238E27FC236}">
+                <a16:creationId xmlns:a16="http://schemas.microsoft.com/office/drawing/2014/main" id="{2D0227AC-507E-47D5-9760-C47D2A23A6C5}"/>
+              </a:ext>
+            </a:extLst>
+          </p:cNvPr>
+          <p:cNvSpPr>
+            <a:spLocks xmlns:a="http://schemas.openxmlformats.org/drawingml/2006/main" noGrp="1"/>
+          </p:cNvSpPr>
+          <p:nvPr/>
+        </p:nvSpPr>
+        <p:spPr>
+          <a:xfrm xmlns:a="http://schemas.openxmlformats.org/drawingml/2006/main">
+            <a:off x="1162050" y="5019675"/>
+            <a:ext cx="400050" cy="400050"/>
+          </a:xfrm>
+          <a:prstGeom xmlns:a="http://schemas.openxmlformats.org/drawingml/2006/main" prst="rect">
+            <a:avLst/>
+          </a:prstGeom>
+          <a:noFill xmlns:a="http://schemas.openxmlformats.org/drawingml/2006/main"/>
+          <a:ln xmlns:a="http://schemas.openxmlformats.org/drawingml/2006/main" w="0">
+            <a:noFill/>
+          </a:ln>
+        </p:spPr>
+        <p:txBody>
+          <a:bodyPr xmlns:a="http://schemas.openxmlformats.org/drawingml/2006/main" anchor="ctr">
+            <a:normAutofit fontScale="100000"/>
+          </a:bodyPr>
+          <a:lstStyle xmlns:a="http://schemas.openxmlformats.org/drawingml/2006/main"/>
+          <a:p xmlns:a="http://schemas.openxmlformats.org/drawingml/2006/main">
+            <a:pPr algn="ctr">
+              <a:defRPr sz="1125" b="1">
                 <a:solidFill>
                   <a:srgbClr val="2F785D"/>
                 </a:solidFill>
                 <a:latin typeface="Arial"/>
                 <a:ea typeface="Arial"/>
                 <a:cs typeface="Arial"/>
+              </a:defRPr>
+            </a:pPr>
+            <a:r>
+              <a:rPr sz="1125" b="1">
+                <a:solidFill>
+                  <a:srgbClr val="2F785D"/>
+                </a:solidFill>
+                <a:latin typeface="Arial"/>
+                <a:ea typeface="Arial"/>
+                <a:cs typeface="Arial"/>
               </a:rPr>
-              <a:t>Check the result: Recombine and check the total or corresponding measure.</a:t>
+              <a:t>5</a:t>
+            </a:r>
+          </a:p>
+        </p:txBody>
+      </p:sp>
+      <p:sp>
+        <p:nvSpPr>
+          <p:cNvPr id="25" name="">
+            <a:extLst xmlns:a="http://schemas.openxmlformats.org/drawingml/2006/main">
+              <a:ext uri="{FF2B5EF4-FFF2-40B4-BE49-F238E27FC236}">
+                <a16:creationId xmlns:a16="http://schemas.microsoft.com/office/drawing/2014/main" id="{F178CB7E-5E94-4508-8CBC-6039D09767D7}"/>
+              </a:ext>
+            </a:extLst>
+          </p:cNvPr>
+          <p:cNvSpPr>
+            <a:spLocks xmlns:a="http://schemas.openxmlformats.org/drawingml/2006/main" noGrp="1"/>
+          </p:cNvSpPr>
+          <p:nvPr/>
+        </p:nvSpPr>
+        <p:spPr>
+          <a:xfrm xmlns:a="http://schemas.openxmlformats.org/drawingml/2006/main">
+            <a:off x="1714500" y="4933950"/>
+            <a:ext cx="9525000" cy="638175"/>
+          </a:xfrm>
+          <a:prstGeom xmlns:a="http://schemas.openxmlformats.org/drawingml/2006/main" prst="rect">
+            <a:avLst/>
+          </a:prstGeom>
+          <a:noFill xmlns:a="http://schemas.openxmlformats.org/drawingml/2006/main"/>
+          <a:ln xmlns:a="http://schemas.openxmlformats.org/drawingml/2006/main" w="0">
+            <a:noFill/>
+          </a:ln>
+        </p:spPr>
+        <p:txBody>
+          <a:bodyPr xmlns:a="http://schemas.openxmlformats.org/drawingml/2006/main" anchor="ctr">
+            <a:normAutofit fontScale="100000"/>
+          </a:bodyPr>
+          <a:lstStyle xmlns:a="http://schemas.openxmlformats.org/drawingml/2006/main"/>
+          <a:p xmlns:a="http://schemas.openxmlformats.org/drawingml/2006/main">
+            <a:pPr algn="l">
+              <a:defRPr sz="1575" b="1">
+                <a:solidFill>
+                  <a:srgbClr val="2F785D"/>
+                </a:solidFill>
+                <a:latin typeface="Arial"/>
+                <a:ea typeface="Arial"/>
+                <a:cs typeface="Arial"/>
+              </a:defRPr>
+            </a:pPr>
+            <a:r>
+              <a:rPr sz="1575" b="1">
+                <a:solidFill>
+                  <a:srgbClr val="2F785D"/>
+                </a:solidFill>
+                <a:latin typeface="Arial"/>
+                <a:ea typeface="Arial"/>
+                <a:cs typeface="Arial"/>
+              </a:rPr>
+              <a:t>24.5 cm</a:t>
             </a:r>
           </a:p>
         </p:txBody>
@@ -8841,7 +8995,7 @@
     </p:spTree>
     <p:extLst>
       <p:ext uri="{BB962C8B-B14F-4D97-AF65-F5344CB8AC3E}">
-        <p14:creationId xmlns:p14="http://schemas.microsoft.com/office/powerpoint/2010/main" val="1881769220"/>
+        <p14:creationId xmlns:p14="http://schemas.microsoft.com/office/powerpoint/2010/main" val="1235787887"/>
       </p:ext>
     </p:extLst>
   </p:cSld>
@@ -9078,6 +9232,51 @@
                       </p:childTnLst>
                     </p:cTn>
                   </p:par>
+                  <p:par>
+                    <p:cTn id="23" fill="hold">
+                      <p:stCondLst>
+                        <p:cond delay="indefinite"/>
+                      </p:stCondLst>
+                      <p:childTnLst>
+                        <p:par>
+                          <p:cTn id="24" fill="hold">
+                            <p:stCondLst>
+                              <p:cond delay="0"/>
+                            </p:stCondLst>
+                            <p:childTnLst>
+                              <p:par>
+                                <p:cTn id="25" presetID="1" presetClass="entr" presetSubtype="0" fill="hold" grpId="0" nodeType="clickEffect">
+                                  <p:stCondLst>
+                                    <p:cond delay="0"/>
+                                  </p:stCondLst>
+                                  <p:childTnLst>
+                                    <p:set>
+                                      <p:cBhvr>
+                                        <p:cTn id="26" dur="1" fill="hold">
+                                          <p:stCondLst>
+                                            <p:cond delay="0"/>
+                                          </p:stCondLst>
+                                        </p:cTn>
+                                        <p:tgtEl>
+                                          <p:spTgt spid="25"/>
+                                        </p:tgtEl>
+                                        <p:attrNameLst>
+                                          <p:attrName>style.visibility</p:attrName>
+                                        </p:attrNameLst>
+                                      </p:cBhvr>
+                                      <p:to>
+                                        <p:strVal val="visible"/>
+                                      </p:to>
+                                    </p:set>
+                                  </p:childTnLst>
+                                </p:cTn>
+                              </p:par>
+                            </p:childTnLst>
+                          </p:cTn>
+                        </p:par>
+                      </p:childTnLst>
+                    </p:cTn>
+                  </p:par>
                 </p:childTnLst>
               </p:cTn>
               <p:prevCondLst>
@@ -9105,6 +9304,7 @@
       <p:bldP spid="16" grpId="0"/>
       <p:bldP spid="19" grpId="0"/>
       <p:bldP spid="22" grpId="0"/>
+      <p:bldP spid="25" grpId="0"/>
     </p:bldLst>
   </p:timing>
 </p:sld>
@@ -9134,7 +9334,7 @@
           <p:cNvPr id="15" name="">
             <a:extLst xmlns:a="http://schemas.openxmlformats.org/drawingml/2006/main">
               <a:ext uri="{FF2B5EF4-FFF2-40B4-BE49-F238E27FC236}">
-                <a16:creationId xmlns:a16="http://schemas.microsoft.com/office/drawing/2014/main" id="{B30FE60D-9B9D-4FF2-B0EA-C24D79DCC1D4}"/>
+                <a16:creationId xmlns:a16="http://schemas.microsoft.com/office/drawing/2014/main" id="{D5E96B4A-0592-47D7-A615-0B3D11FA0208}"/>
               </a:ext>
             </a:extLst>
           </p:cNvPr>
@@ -9166,7 +9366,7 @@
           <p:cNvPr id="2" name="">
             <a:extLst xmlns:a="http://schemas.openxmlformats.org/drawingml/2006/main">
               <a:ext uri="{FF2B5EF4-FFF2-40B4-BE49-F238E27FC236}">
-                <a16:creationId xmlns:a16="http://schemas.microsoft.com/office/drawing/2014/main" id="{6C63702B-239F-4347-B9F1-28C856A4343A}"/>
+                <a16:creationId xmlns:a16="http://schemas.microsoft.com/office/drawing/2014/main" id="{F2F573D0-30CF-4C78-BFEC-1EF51A106EC2}"/>
               </a:ext>
             </a:extLst>
           </p:cNvPr>
@@ -9223,7 +9423,7 @@
           <p:cNvPr id="3" name="">
             <a:extLst xmlns:a="http://schemas.openxmlformats.org/drawingml/2006/main">
               <a:ext uri="{FF2B5EF4-FFF2-40B4-BE49-F238E27FC236}">
-                <a16:creationId xmlns:a16="http://schemas.microsoft.com/office/drawing/2014/main" id="{7563CB13-7D04-4B89-A082-34EE23770B8B}"/>
+                <a16:creationId xmlns:a16="http://schemas.microsoft.com/office/drawing/2014/main" id="{B8BDAC6F-6223-4730-AA6D-DF075C1FB213}"/>
               </a:ext>
             </a:extLst>
           </p:cNvPr>
@@ -9255,7 +9455,7 @@
           <p:cNvPr id="4" name="">
             <a:extLst xmlns:a="http://schemas.openxmlformats.org/drawingml/2006/main">
               <a:ext uri="{FF2B5EF4-FFF2-40B4-BE49-F238E27FC236}">
-                <a16:creationId xmlns:a16="http://schemas.microsoft.com/office/drawing/2014/main" id="{D188CD88-1F8F-4458-B10E-19527EE5ECF4}"/>
+                <a16:creationId xmlns:a16="http://schemas.microsoft.com/office/drawing/2014/main" id="{DB31691C-D6EC-4DAE-91A6-E8088F2FE00E}"/>
               </a:ext>
             </a:extLst>
           </p:cNvPr>
@@ -9312,7 +9512,7 @@
           <p:cNvPr id="5" name="">
             <a:extLst xmlns:a="http://schemas.openxmlformats.org/drawingml/2006/main">
               <a:ext uri="{FF2B5EF4-FFF2-40B4-BE49-F238E27FC236}">
-                <a16:creationId xmlns:a16="http://schemas.microsoft.com/office/drawing/2014/main" id="{B1D9814E-12AD-4C71-BA7E-998AAA777017}"/>
+                <a16:creationId xmlns:a16="http://schemas.microsoft.com/office/drawing/2014/main" id="{2E2B6D3B-B29D-4EBE-B7BF-3FCD27FA15A2}"/>
               </a:ext>
             </a:extLst>
           </p:cNvPr>
@@ -9369,7 +9569,7 @@
           <p:cNvPr id="6" name="">
             <a:extLst xmlns:a="http://schemas.openxmlformats.org/drawingml/2006/main">
               <a:ext uri="{FF2B5EF4-FFF2-40B4-BE49-F238E27FC236}">
-                <a16:creationId xmlns:a16="http://schemas.microsoft.com/office/drawing/2014/main" id="{1B25F12C-5319-4B15-9BA3-0EB14F594F81}"/>
+                <a16:creationId xmlns:a16="http://schemas.microsoft.com/office/drawing/2014/main" id="{84570CA0-A79B-492A-90AB-671B2C573A9D}"/>
               </a:ext>
             </a:extLst>
           </p:cNvPr>
@@ -9426,7 +9626,7 @@
           <p:cNvPr id="7" name="">
             <a:extLst xmlns:a="http://schemas.openxmlformats.org/drawingml/2006/main">
               <a:ext uri="{FF2B5EF4-FFF2-40B4-BE49-F238E27FC236}">
-                <a16:creationId xmlns:a16="http://schemas.microsoft.com/office/drawing/2014/main" id="{F0C6CA61-6A5E-4833-A137-3BF5BCB81CD4}"/>
+                <a16:creationId xmlns:a16="http://schemas.microsoft.com/office/drawing/2014/main" id="{CF4A5BBD-4FD0-48D6-9882-C3C3BA19E801}"/>
               </a:ext>
             </a:extLst>
           </p:cNvPr>
@@ -9458,7 +9658,7 @@
           <p:cNvPr id="8" name="">
             <a:extLst xmlns:a="http://schemas.openxmlformats.org/drawingml/2006/main">
               <a:ext uri="{FF2B5EF4-FFF2-40B4-BE49-F238E27FC236}">
-                <a16:creationId xmlns:a16="http://schemas.microsoft.com/office/drawing/2014/main" id="{2AFC30D6-F8F4-4BDA-AA66-90DA4A8AF184}"/>
+                <a16:creationId xmlns:a16="http://schemas.microsoft.com/office/drawing/2014/main" id="{9B8E06EC-AEED-4F09-83F1-7022209E6CCC}"/>
               </a:ext>
             </a:extLst>
           </p:cNvPr>
@@ -9515,7 +9715,7 @@
           <p:cNvPr id="9" name="">
             <a:extLst xmlns:a="http://schemas.openxmlformats.org/drawingml/2006/main">
               <a:ext uri="{FF2B5EF4-FFF2-40B4-BE49-F238E27FC236}">
-                <a16:creationId xmlns:a16="http://schemas.microsoft.com/office/drawing/2014/main" id="{6B555873-B52C-4712-96BB-3AFBEA24D43A}"/>
+                <a16:creationId xmlns:a16="http://schemas.microsoft.com/office/drawing/2014/main" id="{CB267FFA-6040-477E-A1E2-9F1DA045D76F}"/>
               </a:ext>
             </a:extLst>
           </p:cNvPr>
@@ -9572,7 +9772,7 @@
           <p:cNvPr id="10" name="">
             <a:extLst xmlns:a="http://schemas.openxmlformats.org/drawingml/2006/main">
               <a:ext uri="{FF2B5EF4-FFF2-40B4-BE49-F238E27FC236}">
-                <a16:creationId xmlns:a16="http://schemas.microsoft.com/office/drawing/2014/main" id="{F0ECA440-D9E9-450E-8169-923809651130}"/>
+                <a16:creationId xmlns:a16="http://schemas.microsoft.com/office/drawing/2014/main" id="{6720DDB0-C6E8-4BC2-BAE9-41717C0214FC}"/>
               </a:ext>
             </a:extLst>
           </p:cNvPr>
@@ -9629,7 +9829,7 @@
           <p:cNvPr id="11" name="">
             <a:extLst xmlns:a="http://schemas.openxmlformats.org/drawingml/2006/main">
               <a:ext uri="{FF2B5EF4-FFF2-40B4-BE49-F238E27FC236}">
-                <a16:creationId xmlns:a16="http://schemas.microsoft.com/office/drawing/2014/main" id="{3C96E90A-5974-4424-B408-C3AFEE1575B9}"/>
+                <a16:creationId xmlns:a16="http://schemas.microsoft.com/office/drawing/2014/main" id="{5ED40A68-A8DE-428C-AC22-DC79B0D08098}"/>
               </a:ext>
             </a:extLst>
           </p:cNvPr>
@@ -9686,7 +9886,7 @@
           <p:cNvPr id="12" name="">
             <a:extLst xmlns:a="http://schemas.openxmlformats.org/drawingml/2006/main">
               <a:ext uri="{FF2B5EF4-FFF2-40B4-BE49-F238E27FC236}">
-                <a16:creationId xmlns:a16="http://schemas.microsoft.com/office/drawing/2014/main" id="{EFA056A6-7138-4501-AEE2-7B262796181F}"/>
+                <a16:creationId xmlns:a16="http://schemas.microsoft.com/office/drawing/2014/main" id="{91825F05-82E4-4C90-A07E-59E4AF0953A2}"/>
               </a:ext>
             </a:extLst>
           </p:cNvPr>
@@ -9718,7 +9918,7 @@
           <p:cNvPr id="13" name="">
             <a:extLst xmlns:a="http://schemas.openxmlformats.org/drawingml/2006/main">
               <a:ext uri="{FF2B5EF4-FFF2-40B4-BE49-F238E27FC236}">
-                <a16:creationId xmlns:a16="http://schemas.microsoft.com/office/drawing/2014/main" id="{5B09812B-ECBB-4E6F-9FBB-4AE523EFB028}"/>
+                <a16:creationId xmlns:a16="http://schemas.microsoft.com/office/drawing/2014/main" id="{81A1FD34-2E69-4D48-B669-946759521EEE}"/>
               </a:ext>
             </a:extLst>
           </p:cNvPr>
@@ -9775,7 +9975,7 @@
           <p:cNvPr id="14" name="">
             <a:extLst xmlns:a="http://schemas.openxmlformats.org/drawingml/2006/main">
               <a:ext uri="{FF2B5EF4-FFF2-40B4-BE49-F238E27FC236}">
-                <a16:creationId xmlns:a16="http://schemas.microsoft.com/office/drawing/2014/main" id="{B49397FE-2A39-4282-AC01-9975F44A659C}"/>
+                <a16:creationId xmlns:a16="http://schemas.microsoft.com/office/drawing/2014/main" id="{6F80DB0A-9DBF-4B9A-A395-6422C6F1EF70}"/>
               </a:ext>
             </a:extLst>
           </p:cNvPr>
@@ -9830,7 +10030,7 @@
     </p:spTree>
     <p:extLst>
       <p:ext uri="{BB962C8B-B14F-4D97-AF65-F5344CB8AC3E}">
-        <p14:creationId xmlns:p14="http://schemas.microsoft.com/office/powerpoint/2010/main" val="987377795"/>
+        <p14:creationId xmlns:p14="http://schemas.microsoft.com/office/powerpoint/2010/main" val="106979908"/>
       </p:ext>
     </p:extLst>
   </p:cSld>
@@ -10031,7 +10231,7 @@
           <p:cNvPr id="16" name="">
             <a:extLst xmlns:a="http://schemas.openxmlformats.org/drawingml/2006/main">
               <a:ext uri="{FF2B5EF4-FFF2-40B4-BE49-F238E27FC236}">
-                <a16:creationId xmlns:a16="http://schemas.microsoft.com/office/drawing/2014/main" id="{68BFCE61-C49A-4F9A-A679-E2D53573843E}"/>
+                <a16:creationId xmlns:a16="http://schemas.microsoft.com/office/drawing/2014/main" id="{BDC6EE98-1385-4D80-80AB-B6DF31C8A5DE}"/>
               </a:ext>
             </a:extLst>
           </p:cNvPr>
@@ -10063,7 +10263,7 @@
           <p:cNvPr id="2" name="">
             <a:extLst xmlns:a="http://schemas.openxmlformats.org/drawingml/2006/main">
               <a:ext uri="{FF2B5EF4-FFF2-40B4-BE49-F238E27FC236}">
-                <a16:creationId xmlns:a16="http://schemas.microsoft.com/office/drawing/2014/main" id="{DEA351B4-2591-4EBA-8D1B-C2ACD3590A89}"/>
+                <a16:creationId xmlns:a16="http://schemas.microsoft.com/office/drawing/2014/main" id="{9424372F-EADA-4724-94BC-186DE06F6A9E}"/>
               </a:ext>
             </a:extLst>
           </p:cNvPr>
@@ -10120,7 +10320,7 @@
           <p:cNvPr id="3" name="">
             <a:extLst xmlns:a="http://schemas.openxmlformats.org/drawingml/2006/main">
               <a:ext uri="{FF2B5EF4-FFF2-40B4-BE49-F238E27FC236}">
-                <a16:creationId xmlns:a16="http://schemas.microsoft.com/office/drawing/2014/main" id="{F1CA6F02-423B-49E4-86D9-59FF993D9262}"/>
+                <a16:creationId xmlns:a16="http://schemas.microsoft.com/office/drawing/2014/main" id="{F3C89CED-4FB3-4955-861D-C7D5151FA142}"/>
               </a:ext>
             </a:extLst>
           </p:cNvPr>
@@ -10152,7 +10352,7 @@
           <p:cNvPr id="4" name="">
             <a:extLst xmlns:a="http://schemas.openxmlformats.org/drawingml/2006/main">
               <a:ext uri="{FF2B5EF4-FFF2-40B4-BE49-F238E27FC236}">
-                <a16:creationId xmlns:a16="http://schemas.microsoft.com/office/drawing/2014/main" id="{D1DF10C9-F05E-4683-99A4-4ACEF42FBA15}"/>
+                <a16:creationId xmlns:a16="http://schemas.microsoft.com/office/drawing/2014/main" id="{C93C6E03-1B25-4643-BC99-9B81557301F2}"/>
               </a:ext>
             </a:extLst>
           </p:cNvPr>
@@ -10209,7 +10409,7 @@
           <p:cNvPr id="5" name="">
             <a:extLst xmlns:a="http://schemas.openxmlformats.org/drawingml/2006/main">
               <a:ext uri="{FF2B5EF4-FFF2-40B4-BE49-F238E27FC236}">
-                <a16:creationId xmlns:a16="http://schemas.microsoft.com/office/drawing/2014/main" id="{A97E35C5-C474-44B0-B4B4-07BF72387611}"/>
+                <a16:creationId xmlns:a16="http://schemas.microsoft.com/office/drawing/2014/main" id="{A9AB97CE-7348-4082-9D21-6B7FE6EAAED8}"/>
               </a:ext>
             </a:extLst>
           </p:cNvPr>
@@ -10266,7 +10466,7 @@
           <p:cNvPr id="6" name="">
             <a:extLst xmlns:a="http://schemas.openxmlformats.org/drawingml/2006/main">
               <a:ext uri="{FF2B5EF4-FFF2-40B4-BE49-F238E27FC236}">
-                <a16:creationId xmlns:a16="http://schemas.microsoft.com/office/drawing/2014/main" id="{7BA15DA1-7730-4012-AE8B-57C45490E838}"/>
+                <a16:creationId xmlns:a16="http://schemas.microsoft.com/office/drawing/2014/main" id="{CEE99F39-2A1B-4AC2-8DF9-1D900127C58E}"/>
               </a:ext>
             </a:extLst>
           </p:cNvPr>
@@ -10323,7 +10523,7 @@
           <p:cNvPr id="7" name="">
             <a:extLst xmlns:a="http://schemas.openxmlformats.org/drawingml/2006/main">
               <a:ext uri="{FF2B5EF4-FFF2-40B4-BE49-F238E27FC236}">
-                <a16:creationId xmlns:a16="http://schemas.microsoft.com/office/drawing/2014/main" id="{1857B914-8599-432C-9E4A-2C66D03FB50C}"/>
+                <a16:creationId xmlns:a16="http://schemas.microsoft.com/office/drawing/2014/main" id="{577AA997-B516-4A2F-BFD8-DA7C8A793D90}"/>
               </a:ext>
             </a:extLst>
           </p:cNvPr>
@@ -10355,7 +10555,7 @@
           <p:cNvPr id="8" name="">
             <a:extLst xmlns:a="http://schemas.openxmlformats.org/drawingml/2006/main">
               <a:ext uri="{FF2B5EF4-FFF2-40B4-BE49-F238E27FC236}">
-                <a16:creationId xmlns:a16="http://schemas.microsoft.com/office/drawing/2014/main" id="{F97A7726-28C0-4BDB-90CD-916E24C9F7ED}"/>
+                <a16:creationId xmlns:a16="http://schemas.microsoft.com/office/drawing/2014/main" id="{14E15230-EAFE-49CD-A377-A30DCA06787B}"/>
               </a:ext>
             </a:extLst>
           </p:cNvPr>
@@ -10412,7 +10612,7 @@
           <p:cNvPr id="9" name="">
             <a:extLst xmlns:a="http://schemas.openxmlformats.org/drawingml/2006/main">
               <a:ext uri="{FF2B5EF4-FFF2-40B4-BE49-F238E27FC236}">
-                <a16:creationId xmlns:a16="http://schemas.microsoft.com/office/drawing/2014/main" id="{92B0906B-C7A4-4361-9237-C841EFB1EC9D}"/>
+                <a16:creationId xmlns:a16="http://schemas.microsoft.com/office/drawing/2014/main" id="{88C90C54-5829-4A02-B17F-3EDEBEBD721A}"/>
               </a:ext>
             </a:extLst>
           </p:cNvPr>
@@ -10469,7 +10669,7 @@
           <p:cNvPr id="10" name="">
             <a:extLst xmlns:a="http://schemas.openxmlformats.org/drawingml/2006/main">
               <a:ext uri="{FF2B5EF4-FFF2-40B4-BE49-F238E27FC236}">
-                <a16:creationId xmlns:a16="http://schemas.microsoft.com/office/drawing/2014/main" id="{9D1BBC39-D967-45D0-B99E-486DB7F97094}"/>
+                <a16:creationId xmlns:a16="http://schemas.microsoft.com/office/drawing/2014/main" id="{D1412135-E83E-48E1-8406-7F06A2C19D75}"/>
               </a:ext>
             </a:extLst>
           </p:cNvPr>
@@ -10526,7 +10726,7 @@
           <p:cNvPr id="11" name="">
             <a:extLst xmlns:a="http://schemas.openxmlformats.org/drawingml/2006/main">
               <a:ext uri="{FF2B5EF4-FFF2-40B4-BE49-F238E27FC236}">
-                <a16:creationId xmlns:a16="http://schemas.microsoft.com/office/drawing/2014/main" id="{54ABBA4A-419F-436F-9492-30A815673017}"/>
+                <a16:creationId xmlns:a16="http://schemas.microsoft.com/office/drawing/2014/main" id="{9B3F1CD0-1F3F-4AE9-8796-D33AFA42BCF9}"/>
               </a:ext>
             </a:extLst>
           </p:cNvPr>
@@ -10583,7 +10783,7 @@
           <p:cNvPr id="12" name="">
             <a:extLst xmlns:a="http://schemas.openxmlformats.org/drawingml/2006/main">
               <a:ext uri="{FF2B5EF4-FFF2-40B4-BE49-F238E27FC236}">
-                <a16:creationId xmlns:a16="http://schemas.microsoft.com/office/drawing/2014/main" id="{8BA1AA0B-B454-476C-A1FD-642A145D7DB5}"/>
+                <a16:creationId xmlns:a16="http://schemas.microsoft.com/office/drawing/2014/main" id="{5005C33D-D362-4F03-8C00-F400A7E442EC}"/>
               </a:ext>
             </a:extLst>
           </p:cNvPr>
@@ -10640,7 +10840,7 @@
           <p:cNvPr id="13" name="">
             <a:extLst xmlns:a="http://schemas.openxmlformats.org/drawingml/2006/main">
               <a:ext uri="{FF2B5EF4-FFF2-40B4-BE49-F238E27FC236}">
-                <a16:creationId xmlns:a16="http://schemas.microsoft.com/office/drawing/2014/main" id="{A9377B62-677D-4B89-83A7-E8279EA4C795}"/>
+                <a16:creationId xmlns:a16="http://schemas.microsoft.com/office/drawing/2014/main" id="{BBB18F7D-FC54-4C65-B5A4-063ECB9F2555}"/>
               </a:ext>
             </a:extLst>
           </p:cNvPr>
@@ -10697,7 +10897,7 @@
           <p:cNvPr id="14" name="">
             <a:extLst xmlns:a="http://schemas.openxmlformats.org/drawingml/2006/main">
               <a:ext uri="{FF2B5EF4-FFF2-40B4-BE49-F238E27FC236}">
-                <a16:creationId xmlns:a16="http://schemas.microsoft.com/office/drawing/2014/main" id="{EC6789B6-8F3C-4B94-B520-10D996C2E669}"/>
+                <a16:creationId xmlns:a16="http://schemas.microsoft.com/office/drawing/2014/main" id="{9B40130B-BD34-4A77-8714-1A4C171CBAB2}"/>
               </a:ext>
             </a:extLst>
           </p:cNvPr>
@@ -10754,7 +10954,7 @@
           <p:cNvPr id="15" name="">
             <a:extLst xmlns:a="http://schemas.openxmlformats.org/drawingml/2006/main">
               <a:ext uri="{FF2B5EF4-FFF2-40B4-BE49-F238E27FC236}">
-                <a16:creationId xmlns:a16="http://schemas.microsoft.com/office/drawing/2014/main" id="{C7A04935-0D60-4BFA-9042-FFD7DC4CE78C}"/>
+                <a16:creationId xmlns:a16="http://schemas.microsoft.com/office/drawing/2014/main" id="{87FC4C33-2E7B-4F88-A26D-A62D888F9157}"/>
               </a:ext>
             </a:extLst>
           </p:cNvPr>
@@ -10809,7 +11009,7 @@
     </p:spTree>
     <p:extLst>
       <p:ext uri="{BB962C8B-B14F-4D97-AF65-F5344CB8AC3E}">
-        <p14:creationId xmlns:p14="http://schemas.microsoft.com/office/powerpoint/2010/main" val="1680175196"/>
+        <p14:creationId xmlns:p14="http://schemas.microsoft.com/office/powerpoint/2010/main" val="176253322"/>
       </p:ext>
     </p:extLst>
   </p:cSld>
@@ -10964,7 +11164,7 @@
           <p:cNvPr id="16" name="">
             <a:extLst xmlns:a="http://schemas.openxmlformats.org/drawingml/2006/main">
               <a:ext uri="{FF2B5EF4-FFF2-40B4-BE49-F238E27FC236}">
-                <a16:creationId xmlns:a16="http://schemas.microsoft.com/office/drawing/2014/main" id="{49FF075D-25D4-4DE8-93F6-500DCF048590}"/>
+                <a16:creationId xmlns:a16="http://schemas.microsoft.com/office/drawing/2014/main" id="{05561715-0417-42E6-84A6-972A35601857}"/>
               </a:ext>
             </a:extLst>
           </p:cNvPr>
@@ -10996,7 +11196,7 @@
           <p:cNvPr id="2" name="">
             <a:extLst xmlns:a="http://schemas.openxmlformats.org/drawingml/2006/main">
               <a:ext uri="{FF2B5EF4-FFF2-40B4-BE49-F238E27FC236}">
-                <a16:creationId xmlns:a16="http://schemas.microsoft.com/office/drawing/2014/main" id="{CA148949-B5FF-4929-B312-4A43EF3A7C61}"/>
+                <a16:creationId xmlns:a16="http://schemas.microsoft.com/office/drawing/2014/main" id="{F9A3D68A-2E8E-4A54-A07A-1A8726A4F8FF}"/>
               </a:ext>
             </a:extLst>
           </p:cNvPr>
@@ -11053,7 +11253,7 @@
           <p:cNvPr id="3" name="">
             <a:extLst xmlns:a="http://schemas.openxmlformats.org/drawingml/2006/main">
               <a:ext uri="{FF2B5EF4-FFF2-40B4-BE49-F238E27FC236}">
-                <a16:creationId xmlns:a16="http://schemas.microsoft.com/office/drawing/2014/main" id="{32B19805-A5BF-42B4-B7BE-1ED9968165C9}"/>
+                <a16:creationId xmlns:a16="http://schemas.microsoft.com/office/drawing/2014/main" id="{AF8F57B0-F907-4A67-8BF2-652C96AF1E5B}"/>
               </a:ext>
             </a:extLst>
           </p:cNvPr>
@@ -11085,7 +11285,7 @@
           <p:cNvPr id="4" name="">
             <a:extLst xmlns:a="http://schemas.openxmlformats.org/drawingml/2006/main">
               <a:ext uri="{FF2B5EF4-FFF2-40B4-BE49-F238E27FC236}">
-                <a16:creationId xmlns:a16="http://schemas.microsoft.com/office/drawing/2014/main" id="{FF951AC0-6D9D-47C9-8BC8-7262132D1736}"/>
+                <a16:creationId xmlns:a16="http://schemas.microsoft.com/office/drawing/2014/main" id="{C7EF6C1D-93E2-4448-A009-FEF54F058900}"/>
               </a:ext>
             </a:extLst>
           </p:cNvPr>
@@ -11142,7 +11342,7 @@
           <p:cNvPr id="5" name="">
             <a:extLst xmlns:a="http://schemas.openxmlformats.org/drawingml/2006/main">
               <a:ext uri="{FF2B5EF4-FFF2-40B4-BE49-F238E27FC236}">
-                <a16:creationId xmlns:a16="http://schemas.microsoft.com/office/drawing/2014/main" id="{C8BB3DFA-6D3E-4DF8-9EEB-95100AF776B7}"/>
+                <a16:creationId xmlns:a16="http://schemas.microsoft.com/office/drawing/2014/main" id="{4899389B-B16F-4D01-B849-E95C73C7C272}"/>
               </a:ext>
             </a:extLst>
           </p:cNvPr>
@@ -11199,7 +11399,7 @@
           <p:cNvPr id="6" name="">
             <a:extLst xmlns:a="http://schemas.openxmlformats.org/drawingml/2006/main">
               <a:ext uri="{FF2B5EF4-FFF2-40B4-BE49-F238E27FC236}">
-                <a16:creationId xmlns:a16="http://schemas.microsoft.com/office/drawing/2014/main" id="{88AE0C9F-E6FB-4773-ADFE-A284488857FF}"/>
+                <a16:creationId xmlns:a16="http://schemas.microsoft.com/office/drawing/2014/main" id="{A85F8593-43E8-47C4-BF58-056FA1A9DA2F}"/>
               </a:ext>
             </a:extLst>
           </p:cNvPr>
@@ -11256,7 +11456,7 @@
           <p:cNvPr id="7" name="">
             <a:extLst xmlns:a="http://schemas.openxmlformats.org/drawingml/2006/main">
               <a:ext uri="{FF2B5EF4-FFF2-40B4-BE49-F238E27FC236}">
-                <a16:creationId xmlns:a16="http://schemas.microsoft.com/office/drawing/2014/main" id="{258F7054-E320-4873-85FD-7E3ABD339AC8}"/>
+                <a16:creationId xmlns:a16="http://schemas.microsoft.com/office/drawing/2014/main" id="{8E7A1151-883B-44F6-84AE-EAEBD48FA8DA}"/>
               </a:ext>
             </a:extLst>
           </p:cNvPr>
@@ -11288,7 +11488,7 @@
           <p:cNvPr id="8" name="">
             <a:extLst xmlns:a="http://schemas.openxmlformats.org/drawingml/2006/main">
               <a:ext uri="{FF2B5EF4-FFF2-40B4-BE49-F238E27FC236}">
-                <a16:creationId xmlns:a16="http://schemas.microsoft.com/office/drawing/2014/main" id="{DE5C5411-6149-42AB-AFF5-8A72AB9CC60B}"/>
+                <a16:creationId xmlns:a16="http://schemas.microsoft.com/office/drawing/2014/main" id="{B817ACE1-8593-448E-97B4-3BB87EB6E960}"/>
               </a:ext>
             </a:extLst>
           </p:cNvPr>
@@ -11345,7 +11545,7 @@
           <p:cNvPr id="9" name="">
             <a:extLst xmlns:a="http://schemas.openxmlformats.org/drawingml/2006/main">
               <a:ext uri="{FF2B5EF4-FFF2-40B4-BE49-F238E27FC236}">
-                <a16:creationId xmlns:a16="http://schemas.microsoft.com/office/drawing/2014/main" id="{60D0EC7C-2B0C-4A4C-9B09-006EE83E229D}"/>
+                <a16:creationId xmlns:a16="http://schemas.microsoft.com/office/drawing/2014/main" id="{9658D2D6-232A-407C-8D92-95CE7E965E29}"/>
               </a:ext>
             </a:extLst>
           </p:cNvPr>
@@ -11406,7 +11606,7 @@
           <p:nvPr/>
         </p:nvPicPr>
         <p:blipFill>
-          <a:blip xmlns:r="http://schemas.openxmlformats.org/officeDocument/2006/relationships" xmlns:a="http://schemas.openxmlformats.org/drawingml/2006/main" r:embed="R6b1754629ba14dd2"/>
+          <a:blip xmlns:r="http://schemas.openxmlformats.org/officeDocument/2006/relationships" xmlns:a="http://schemas.openxmlformats.org/drawingml/2006/main" r:embed="R6fc62fc0d09446ba"/>
           <a:stretch xmlns:a="http://schemas.openxmlformats.org/drawingml/2006/main"/>
         </p:blipFill>
         <p:spPr>
@@ -11424,7 +11624,7 @@
           <p:cNvPr id="11" name="">
             <a:extLst xmlns:a="http://schemas.openxmlformats.org/drawingml/2006/main">
               <a:ext uri="{FF2B5EF4-FFF2-40B4-BE49-F238E27FC236}">
-                <a16:creationId xmlns:a16="http://schemas.microsoft.com/office/drawing/2014/main" id="{13A75714-BBBC-4AB6-B6C7-0A5C39156CD3}"/>
+                <a16:creationId xmlns:a16="http://schemas.microsoft.com/office/drawing/2014/main" id="{80AFC12C-637D-4714-92CB-B94A1C4BECD3}"/>
               </a:ext>
             </a:extLst>
           </p:cNvPr>
@@ -11481,7 +11681,7 @@
           <p:cNvPr id="12" name="">
             <a:extLst xmlns:a="http://schemas.openxmlformats.org/drawingml/2006/main">
               <a:ext uri="{FF2B5EF4-FFF2-40B4-BE49-F238E27FC236}">
-                <a16:creationId xmlns:a16="http://schemas.microsoft.com/office/drawing/2014/main" id="{71441466-08CD-4EA6-8287-D323D66231C4}"/>
+                <a16:creationId xmlns:a16="http://schemas.microsoft.com/office/drawing/2014/main" id="{5F8F02CC-88C3-4A55-BAEF-033C52DC07F3}"/>
               </a:ext>
             </a:extLst>
           </p:cNvPr>
@@ -11538,7 +11738,7 @@
           <p:cNvPr id="13" name="">
             <a:extLst xmlns:a="http://schemas.openxmlformats.org/drawingml/2006/main">
               <a:ext uri="{FF2B5EF4-FFF2-40B4-BE49-F238E27FC236}">
-                <a16:creationId xmlns:a16="http://schemas.microsoft.com/office/drawing/2014/main" id="{6F86D4CA-55F7-4B97-AADC-BB2ACBF2D15C}"/>
+                <a16:creationId xmlns:a16="http://schemas.microsoft.com/office/drawing/2014/main" id="{138128F7-4A62-4F59-8D1F-03E7FBBE4555}"/>
               </a:ext>
             </a:extLst>
           </p:cNvPr>
@@ -11570,7 +11770,7 @@
           <p:cNvPr id="14" name="">
             <a:extLst xmlns:a="http://schemas.openxmlformats.org/drawingml/2006/main">
               <a:ext uri="{FF2B5EF4-FFF2-40B4-BE49-F238E27FC236}">
-                <a16:creationId xmlns:a16="http://schemas.microsoft.com/office/drawing/2014/main" id="{15E71766-6A16-4975-BA40-95DDCD609A10}"/>
+                <a16:creationId xmlns:a16="http://schemas.microsoft.com/office/drawing/2014/main" id="{1EF8A6ED-C9CD-4729-85BE-6EE625A71AA7}"/>
               </a:ext>
             </a:extLst>
           </p:cNvPr>
@@ -11627,7 +11827,7 @@
           <p:cNvPr id="15" name="">
             <a:extLst xmlns:a="http://schemas.openxmlformats.org/drawingml/2006/main">
               <a:ext uri="{FF2B5EF4-FFF2-40B4-BE49-F238E27FC236}">
-                <a16:creationId xmlns:a16="http://schemas.microsoft.com/office/drawing/2014/main" id="{0C8DD4A9-4E67-4657-ACE9-74E5AAC439E7}"/>
+                <a16:creationId xmlns:a16="http://schemas.microsoft.com/office/drawing/2014/main" id="{76F981A6-EEB0-4126-A478-BD04B6908D68}"/>
               </a:ext>
             </a:extLst>
           </p:cNvPr>
@@ -11682,7 +11882,7 @@
     </p:spTree>
     <p:extLst>
       <p:ext uri="{BB962C8B-B14F-4D97-AF65-F5344CB8AC3E}">
-        <p14:creationId xmlns:p14="http://schemas.microsoft.com/office/powerpoint/2010/main" val="275725468"/>
+        <p14:creationId xmlns:p14="http://schemas.microsoft.com/office/powerpoint/2010/main" val="793890119"/>
       </p:ext>
     </p:extLst>
   </p:cSld>
@@ -11837,7 +12037,7 @@
           <p:cNvPr id="23" name="">
             <a:extLst xmlns:a="http://schemas.openxmlformats.org/drawingml/2006/main">
               <a:ext uri="{FF2B5EF4-FFF2-40B4-BE49-F238E27FC236}">
-                <a16:creationId xmlns:a16="http://schemas.microsoft.com/office/drawing/2014/main" id="{E2662AAF-6AE3-4400-862E-D77DFB0EA4F4}"/>
+                <a16:creationId xmlns:a16="http://schemas.microsoft.com/office/drawing/2014/main" id="{0EFA6508-B4B0-4755-86F6-80482DF9A0DA}"/>
               </a:ext>
             </a:extLst>
           </p:cNvPr>
@@ -11869,7 +12069,7 @@
           <p:cNvPr id="2" name="">
             <a:extLst xmlns:a="http://schemas.openxmlformats.org/drawingml/2006/main">
               <a:ext uri="{FF2B5EF4-FFF2-40B4-BE49-F238E27FC236}">
-                <a16:creationId xmlns:a16="http://schemas.microsoft.com/office/drawing/2014/main" id="{1842F1E3-5FFD-4F69-A28C-8D008552C5C8}"/>
+                <a16:creationId xmlns:a16="http://schemas.microsoft.com/office/drawing/2014/main" id="{889C1A2F-C9A0-428D-9F75-8EA749743E06}"/>
               </a:ext>
             </a:extLst>
           </p:cNvPr>
@@ -11926,7 +12126,7 @@
           <p:cNvPr id="3" name="">
             <a:extLst xmlns:a="http://schemas.openxmlformats.org/drawingml/2006/main">
               <a:ext uri="{FF2B5EF4-FFF2-40B4-BE49-F238E27FC236}">
-                <a16:creationId xmlns:a16="http://schemas.microsoft.com/office/drawing/2014/main" id="{AA280C2D-ED75-464B-A2A6-1930BC4D0DCC}"/>
+                <a16:creationId xmlns:a16="http://schemas.microsoft.com/office/drawing/2014/main" id="{8E5B69D2-DFDB-4325-B0A5-AD3FD0F3A4D0}"/>
               </a:ext>
             </a:extLst>
           </p:cNvPr>
@@ -11958,7 +12158,7 @@
           <p:cNvPr id="4" name="">
             <a:extLst xmlns:a="http://schemas.openxmlformats.org/drawingml/2006/main">
               <a:ext uri="{FF2B5EF4-FFF2-40B4-BE49-F238E27FC236}">
-                <a16:creationId xmlns:a16="http://schemas.microsoft.com/office/drawing/2014/main" id="{CAA3EF08-8BF4-4909-92FC-E6DFB6AE5CE8}"/>
+                <a16:creationId xmlns:a16="http://schemas.microsoft.com/office/drawing/2014/main" id="{2D615626-5E5B-4C92-9BAA-CA97FDCF6581}"/>
               </a:ext>
             </a:extLst>
           </p:cNvPr>
@@ -12015,7 +12215,7 @@
           <p:cNvPr id="5" name="">
             <a:extLst xmlns:a="http://schemas.openxmlformats.org/drawingml/2006/main">
               <a:ext uri="{FF2B5EF4-FFF2-40B4-BE49-F238E27FC236}">
-                <a16:creationId xmlns:a16="http://schemas.microsoft.com/office/drawing/2014/main" id="{C6C1F93E-EFBA-43CB-BC4A-47DCF5A4A521}"/>
+                <a16:creationId xmlns:a16="http://schemas.microsoft.com/office/drawing/2014/main" id="{5F55D0C3-FAC5-4EA5-95CE-4253E58025B6}"/>
               </a:ext>
             </a:extLst>
           </p:cNvPr>
@@ -12072,7 +12272,7 @@
           <p:cNvPr id="6" name="">
             <a:extLst xmlns:a="http://schemas.openxmlformats.org/drawingml/2006/main">
               <a:ext uri="{FF2B5EF4-FFF2-40B4-BE49-F238E27FC236}">
-                <a16:creationId xmlns:a16="http://schemas.microsoft.com/office/drawing/2014/main" id="{99A6F52A-C424-47F2-904B-DD36B800E6A5}"/>
+                <a16:creationId xmlns:a16="http://schemas.microsoft.com/office/drawing/2014/main" id="{8ABC49B6-5089-4D35-BE11-F728831813A3}"/>
               </a:ext>
             </a:extLst>
           </p:cNvPr>
@@ -12129,7 +12329,7 @@
           <p:cNvPr id="7" name="">
             <a:extLst xmlns:a="http://schemas.openxmlformats.org/drawingml/2006/main">
               <a:ext uri="{FF2B5EF4-FFF2-40B4-BE49-F238E27FC236}">
-                <a16:creationId xmlns:a16="http://schemas.microsoft.com/office/drawing/2014/main" id="{6C0E0212-208A-4347-A4C9-8F9F58FDCB23}"/>
+                <a16:creationId xmlns:a16="http://schemas.microsoft.com/office/drawing/2014/main" id="{96FD787D-946F-42FB-9CB9-27E43681B7E8}"/>
               </a:ext>
             </a:extLst>
           </p:cNvPr>
@@ -12161,7 +12361,7 @@
           <p:cNvPr id="8" name="">
             <a:extLst xmlns:a="http://schemas.openxmlformats.org/drawingml/2006/main">
               <a:ext uri="{FF2B5EF4-FFF2-40B4-BE49-F238E27FC236}">
-                <a16:creationId xmlns:a16="http://schemas.microsoft.com/office/drawing/2014/main" id="{30BF5677-6C41-46F3-9DDD-23DEE85DC853}"/>
+                <a16:creationId xmlns:a16="http://schemas.microsoft.com/office/drawing/2014/main" id="{0F5F098F-02FE-43C5-9E42-8788ADB86823}"/>
               </a:ext>
             </a:extLst>
           </p:cNvPr>
@@ -12218,7 +12418,7 @@
           <p:cNvPr id="9" name="">
             <a:extLst xmlns:a="http://schemas.openxmlformats.org/drawingml/2006/main">
               <a:ext uri="{FF2B5EF4-FFF2-40B4-BE49-F238E27FC236}">
-                <a16:creationId xmlns:a16="http://schemas.microsoft.com/office/drawing/2014/main" id="{5DB8A4FE-0857-495F-9673-307EA71AB879}"/>
+                <a16:creationId xmlns:a16="http://schemas.microsoft.com/office/drawing/2014/main" id="{E2DC05BD-3C62-468B-A251-0888FAC04A3D}"/>
               </a:ext>
             </a:extLst>
           </p:cNvPr>
@@ -12275,7 +12475,7 @@
           <p:cNvPr id="10" name="">
             <a:extLst xmlns:a="http://schemas.openxmlformats.org/drawingml/2006/main">
               <a:ext uri="{FF2B5EF4-FFF2-40B4-BE49-F238E27FC236}">
-                <a16:creationId xmlns:a16="http://schemas.microsoft.com/office/drawing/2014/main" id="{B88066A6-7A84-4B03-8E19-D83DB9997912}"/>
+                <a16:creationId xmlns:a16="http://schemas.microsoft.com/office/drawing/2014/main" id="{72EAF4C5-02C1-44F3-94AD-EB689C0420EA}"/>
               </a:ext>
             </a:extLst>
           </p:cNvPr>
@@ -12309,7 +12509,7 @@
           <p:cNvPr id="11" name="">
             <a:extLst xmlns:a="http://schemas.openxmlformats.org/drawingml/2006/main">
               <a:ext uri="{FF2B5EF4-FFF2-40B4-BE49-F238E27FC236}">
-                <a16:creationId xmlns:a16="http://schemas.microsoft.com/office/drawing/2014/main" id="{DA3479B5-17C1-4BBE-B7C4-3C8ECDB4DC78}"/>
+                <a16:creationId xmlns:a16="http://schemas.microsoft.com/office/drawing/2014/main" id="{5CE40BA3-E579-420F-9854-0BA00ABB2F55}"/>
               </a:ext>
             </a:extLst>
           </p:cNvPr>
@@ -12341,7 +12541,7 @@
           <p:cNvPr id="12" name="">
             <a:extLst xmlns:a="http://schemas.openxmlformats.org/drawingml/2006/main">
               <a:ext uri="{FF2B5EF4-FFF2-40B4-BE49-F238E27FC236}">
-                <a16:creationId xmlns:a16="http://schemas.microsoft.com/office/drawing/2014/main" id="{37BC3C63-8ED6-4210-B048-5B2A0CF350B7}"/>
+                <a16:creationId xmlns:a16="http://schemas.microsoft.com/office/drawing/2014/main" id="{C514B748-493F-4EC8-BE24-7F8F2FF6FA24}"/>
               </a:ext>
             </a:extLst>
           </p:cNvPr>
@@ -12398,7 +12598,7 @@
           <p:cNvPr id="13" name="">
             <a:extLst xmlns:a="http://schemas.openxmlformats.org/drawingml/2006/main">
               <a:ext uri="{FF2B5EF4-FFF2-40B4-BE49-F238E27FC236}">
-                <a16:creationId xmlns:a16="http://schemas.microsoft.com/office/drawing/2014/main" id="{6EA3E18F-6FBE-4FD4-A553-7DFB4E298917}"/>
+                <a16:creationId xmlns:a16="http://schemas.microsoft.com/office/drawing/2014/main" id="{786FB608-E4CB-47F7-BFD2-B5BDB5DF4D6C}"/>
               </a:ext>
             </a:extLst>
           </p:cNvPr>
@@ -12455,7 +12655,7 @@
           <p:cNvPr id="14" name="">
             <a:extLst xmlns:a="http://schemas.openxmlformats.org/drawingml/2006/main">
               <a:ext uri="{FF2B5EF4-FFF2-40B4-BE49-F238E27FC236}">
-                <a16:creationId xmlns:a16="http://schemas.microsoft.com/office/drawing/2014/main" id="{297D7544-DD95-4858-9085-DC947264DA8F}"/>
+                <a16:creationId xmlns:a16="http://schemas.microsoft.com/office/drawing/2014/main" id="{D2221350-6980-4838-9013-7ABE9737498D}"/>
               </a:ext>
             </a:extLst>
           </p:cNvPr>
@@ -12489,7 +12689,7 @@
           <p:cNvPr id="15" name="">
             <a:extLst xmlns:a="http://schemas.openxmlformats.org/drawingml/2006/main">
               <a:ext uri="{FF2B5EF4-FFF2-40B4-BE49-F238E27FC236}">
-                <a16:creationId xmlns:a16="http://schemas.microsoft.com/office/drawing/2014/main" id="{272633EF-EF4E-4635-98AE-730E3E7CBE19}"/>
+                <a16:creationId xmlns:a16="http://schemas.microsoft.com/office/drawing/2014/main" id="{6E247B9A-F683-4E2D-A81C-6D68D0743E58}"/>
               </a:ext>
             </a:extLst>
           </p:cNvPr>
@@ -12521,7 +12721,7 @@
           <p:cNvPr id="16" name="">
             <a:extLst xmlns:a="http://schemas.openxmlformats.org/drawingml/2006/main">
               <a:ext uri="{FF2B5EF4-FFF2-40B4-BE49-F238E27FC236}">
-                <a16:creationId xmlns:a16="http://schemas.microsoft.com/office/drawing/2014/main" id="{A8340A3A-4C11-4E4E-9F31-4CE3CE62AAE0}"/>
+                <a16:creationId xmlns:a16="http://schemas.microsoft.com/office/drawing/2014/main" id="{A0421801-25DF-4F7D-B8CC-7D8BB70E8844}"/>
               </a:ext>
             </a:extLst>
           </p:cNvPr>
@@ -12578,7 +12778,7 @@
           <p:cNvPr id="17" name="">
             <a:extLst xmlns:a="http://schemas.openxmlformats.org/drawingml/2006/main">
               <a:ext uri="{FF2B5EF4-FFF2-40B4-BE49-F238E27FC236}">
-                <a16:creationId xmlns:a16="http://schemas.microsoft.com/office/drawing/2014/main" id="{2462B8CD-E11F-4B6A-8B88-399E84A9F1E9}"/>
+                <a16:creationId xmlns:a16="http://schemas.microsoft.com/office/drawing/2014/main" id="{D4A2B283-A15F-47D2-B598-E76BD0441FAD}"/>
               </a:ext>
             </a:extLst>
           </p:cNvPr>
@@ -12635,7 +12835,7 @@
           <p:cNvPr id="18" name="">
             <a:extLst xmlns:a="http://schemas.openxmlformats.org/drawingml/2006/main">
               <a:ext uri="{FF2B5EF4-FFF2-40B4-BE49-F238E27FC236}">
-                <a16:creationId xmlns:a16="http://schemas.microsoft.com/office/drawing/2014/main" id="{6549AB24-B664-45B7-B332-52E638E36581}"/>
+                <a16:creationId xmlns:a16="http://schemas.microsoft.com/office/drawing/2014/main" id="{5CC64D4A-6D6C-4EB6-BBD6-FF383687048A}"/>
               </a:ext>
             </a:extLst>
           </p:cNvPr>
@@ -12669,7 +12869,7 @@
           <p:cNvPr id="19" name="">
             <a:extLst xmlns:a="http://schemas.openxmlformats.org/drawingml/2006/main">
               <a:ext uri="{FF2B5EF4-FFF2-40B4-BE49-F238E27FC236}">
-                <a16:creationId xmlns:a16="http://schemas.microsoft.com/office/drawing/2014/main" id="{3D88A7D9-CC1E-40CE-98EF-D48892B3BA4F}"/>
+                <a16:creationId xmlns:a16="http://schemas.microsoft.com/office/drawing/2014/main" id="{8BFC53CE-3FB1-4AFC-86E6-18E5AB0BF64F}"/>
               </a:ext>
             </a:extLst>
           </p:cNvPr>
@@ -12701,7 +12901,7 @@
           <p:cNvPr id="20" name="">
             <a:extLst xmlns:a="http://schemas.openxmlformats.org/drawingml/2006/main">
               <a:ext uri="{FF2B5EF4-FFF2-40B4-BE49-F238E27FC236}">
-                <a16:creationId xmlns:a16="http://schemas.microsoft.com/office/drawing/2014/main" id="{D78028AD-89B8-433D-AD1B-7F35C3DA5D1B}"/>
+                <a16:creationId xmlns:a16="http://schemas.microsoft.com/office/drawing/2014/main" id="{6ECC5A62-E105-4A2D-A8F5-256C1E07B997}"/>
               </a:ext>
             </a:extLst>
           </p:cNvPr>
@@ -12758,7 +12958,7 @@
           <p:cNvPr id="21" name="">
             <a:extLst xmlns:a="http://schemas.openxmlformats.org/drawingml/2006/main">
               <a:ext uri="{FF2B5EF4-FFF2-40B4-BE49-F238E27FC236}">
-                <a16:creationId xmlns:a16="http://schemas.microsoft.com/office/drawing/2014/main" id="{098FF4BC-DD92-4CDA-AAC7-31852C76A010}"/>
+                <a16:creationId xmlns:a16="http://schemas.microsoft.com/office/drawing/2014/main" id="{ED45760D-4097-4533-ADB2-B19F1E3BF514}"/>
               </a:ext>
             </a:extLst>
           </p:cNvPr>
@@ -12815,7 +13015,7 @@
           <p:cNvPr id="22" name="">
             <a:extLst xmlns:a="http://schemas.openxmlformats.org/drawingml/2006/main">
               <a:ext uri="{FF2B5EF4-FFF2-40B4-BE49-F238E27FC236}">
-                <a16:creationId xmlns:a16="http://schemas.microsoft.com/office/drawing/2014/main" id="{F0990B6B-35CB-48AA-9B15-BEA95659E5F8}"/>
+                <a16:creationId xmlns:a16="http://schemas.microsoft.com/office/drawing/2014/main" id="{0CD50AAF-18ED-4B73-974D-F19C3DD36F04}"/>
               </a:ext>
             </a:extLst>
           </p:cNvPr>
@@ -12870,7 +13070,7 @@
     </p:spTree>
     <p:extLst>
       <p:ext uri="{BB962C8B-B14F-4D97-AF65-F5344CB8AC3E}">
-        <p14:creationId xmlns:p14="http://schemas.microsoft.com/office/powerpoint/2010/main" val="1007983248"/>
+        <p14:creationId xmlns:p14="http://schemas.microsoft.com/office/powerpoint/2010/main" val="1988806821"/>
       </p:ext>
     </p:extLst>
   </p:cSld>
@@ -13071,7 +13271,7 @@
           <p:cNvPr id="22" name="">
             <a:extLst xmlns:a="http://schemas.openxmlformats.org/drawingml/2006/main">
               <a:ext uri="{FF2B5EF4-FFF2-40B4-BE49-F238E27FC236}">
-                <a16:creationId xmlns:a16="http://schemas.microsoft.com/office/drawing/2014/main" id="{8ECF807E-0CC0-4FF9-9969-E79DEE1CB047}"/>
+                <a16:creationId xmlns:a16="http://schemas.microsoft.com/office/drawing/2014/main" id="{0A2730AE-6789-4B74-B70C-3AB7A3A4654F}"/>
               </a:ext>
             </a:extLst>
           </p:cNvPr>
@@ -13103,7 +13303,7 @@
           <p:cNvPr id="2" name="">
             <a:extLst xmlns:a="http://schemas.openxmlformats.org/drawingml/2006/main">
               <a:ext uri="{FF2B5EF4-FFF2-40B4-BE49-F238E27FC236}">
-                <a16:creationId xmlns:a16="http://schemas.microsoft.com/office/drawing/2014/main" id="{25EC8651-A3A2-4BCB-ADD0-B6A13AF0E965}"/>
+                <a16:creationId xmlns:a16="http://schemas.microsoft.com/office/drawing/2014/main" id="{1599B811-0C68-4954-865D-1E79CB72EEC6}"/>
               </a:ext>
             </a:extLst>
           </p:cNvPr>
@@ -13160,7 +13360,7 @@
           <p:cNvPr id="3" name="">
             <a:extLst xmlns:a="http://schemas.openxmlformats.org/drawingml/2006/main">
               <a:ext uri="{FF2B5EF4-FFF2-40B4-BE49-F238E27FC236}">
-                <a16:creationId xmlns:a16="http://schemas.microsoft.com/office/drawing/2014/main" id="{DF1079B0-16B1-427E-BB05-DDBA4270D372}"/>
+                <a16:creationId xmlns:a16="http://schemas.microsoft.com/office/drawing/2014/main" id="{EFD864E0-D62E-4E99-B926-38314C6FF08F}"/>
               </a:ext>
             </a:extLst>
           </p:cNvPr>
@@ -13192,7 +13392,7 @@
           <p:cNvPr id="4" name="">
             <a:extLst xmlns:a="http://schemas.openxmlformats.org/drawingml/2006/main">
               <a:ext uri="{FF2B5EF4-FFF2-40B4-BE49-F238E27FC236}">
-                <a16:creationId xmlns:a16="http://schemas.microsoft.com/office/drawing/2014/main" id="{8A5A39B5-4CD7-4BBE-BBE8-EBBB676285E0}"/>
+                <a16:creationId xmlns:a16="http://schemas.microsoft.com/office/drawing/2014/main" id="{7022C0AC-2D82-40D2-8A76-9F7F1F4C7579}"/>
               </a:ext>
             </a:extLst>
           </p:cNvPr>
@@ -13249,7 +13449,7 @@
           <p:cNvPr id="5" name="">
             <a:extLst xmlns:a="http://schemas.openxmlformats.org/drawingml/2006/main">
               <a:ext uri="{FF2B5EF4-FFF2-40B4-BE49-F238E27FC236}">
-                <a16:creationId xmlns:a16="http://schemas.microsoft.com/office/drawing/2014/main" id="{8DE11E0C-3D16-48AB-8455-EAED634B362D}"/>
+                <a16:creationId xmlns:a16="http://schemas.microsoft.com/office/drawing/2014/main" id="{61418089-A86D-4593-A3F1-27735C723CFE}"/>
               </a:ext>
             </a:extLst>
           </p:cNvPr>
@@ -13306,7 +13506,7 @@
           <p:cNvPr id="6" name="">
             <a:extLst xmlns:a="http://schemas.openxmlformats.org/drawingml/2006/main">
               <a:ext uri="{FF2B5EF4-FFF2-40B4-BE49-F238E27FC236}">
-                <a16:creationId xmlns:a16="http://schemas.microsoft.com/office/drawing/2014/main" id="{0FEC950D-E1C2-4C20-9F28-9FDC28168743}"/>
+                <a16:creationId xmlns:a16="http://schemas.microsoft.com/office/drawing/2014/main" id="{ED02544C-A591-417F-9EEA-2B6390DCD236}"/>
               </a:ext>
             </a:extLst>
           </p:cNvPr>
@@ -13363,7 +13563,7 @@
           <p:cNvPr id="7" name="">
             <a:extLst xmlns:a="http://schemas.openxmlformats.org/drawingml/2006/main">
               <a:ext uri="{FF2B5EF4-FFF2-40B4-BE49-F238E27FC236}">
-                <a16:creationId xmlns:a16="http://schemas.microsoft.com/office/drawing/2014/main" id="{D61EEB97-0EB4-4359-BFAB-71FA38F8EEA0}"/>
+                <a16:creationId xmlns:a16="http://schemas.microsoft.com/office/drawing/2014/main" id="{C6695AC1-BB12-4D27-B1A8-09547D9378CC}"/>
               </a:ext>
             </a:extLst>
           </p:cNvPr>
@@ -13395,7 +13595,7 @@
           <p:cNvPr id="8" name="">
             <a:extLst xmlns:a="http://schemas.openxmlformats.org/drawingml/2006/main">
               <a:ext uri="{FF2B5EF4-FFF2-40B4-BE49-F238E27FC236}">
-                <a16:creationId xmlns:a16="http://schemas.microsoft.com/office/drawing/2014/main" id="{722398EB-5ED9-4E42-92AF-16C6F12D3DC0}"/>
+                <a16:creationId xmlns:a16="http://schemas.microsoft.com/office/drawing/2014/main" id="{0E41D242-E5A5-47EF-A172-5C27011C009F}"/>
               </a:ext>
             </a:extLst>
           </p:cNvPr>
@@ -13452,7 +13652,7 @@
           <p:cNvPr id="9" name="">
             <a:extLst xmlns:a="http://schemas.openxmlformats.org/drawingml/2006/main">
               <a:ext uri="{FF2B5EF4-FFF2-40B4-BE49-F238E27FC236}">
-                <a16:creationId xmlns:a16="http://schemas.microsoft.com/office/drawing/2014/main" id="{5581F41A-CF41-4840-B1F2-747BE275EEAC}"/>
+                <a16:creationId xmlns:a16="http://schemas.microsoft.com/office/drawing/2014/main" id="{46F90D91-8864-4CD3-AE07-715447782545}"/>
               </a:ext>
             </a:extLst>
           </p:cNvPr>
@@ -13509,7 +13709,7 @@
           <p:cNvPr id="10" name="">
             <a:extLst xmlns:a="http://schemas.openxmlformats.org/drawingml/2006/main">
               <a:ext uri="{FF2B5EF4-FFF2-40B4-BE49-F238E27FC236}">
-                <a16:creationId xmlns:a16="http://schemas.microsoft.com/office/drawing/2014/main" id="{62E71D56-D518-471A-A094-A2952A6A6F30}"/>
+                <a16:creationId xmlns:a16="http://schemas.microsoft.com/office/drawing/2014/main" id="{B718DC4C-F9B1-4051-8ACC-C51F9B814F33}"/>
               </a:ext>
             </a:extLst>
           </p:cNvPr>
@@ -13543,7 +13743,7 @@
           <p:cNvPr id="11" name="">
             <a:extLst xmlns:a="http://schemas.openxmlformats.org/drawingml/2006/main">
               <a:ext uri="{FF2B5EF4-FFF2-40B4-BE49-F238E27FC236}">
-                <a16:creationId xmlns:a16="http://schemas.microsoft.com/office/drawing/2014/main" id="{299D7FBC-9548-4539-A64D-4159EDB68E21}"/>
+                <a16:creationId xmlns:a16="http://schemas.microsoft.com/office/drawing/2014/main" id="{F41F9ADA-C200-4A39-84CB-776BDA0D8070}"/>
               </a:ext>
             </a:extLst>
           </p:cNvPr>
@@ -13575,7 +13775,7 @@
           <p:cNvPr id="12" name="">
             <a:extLst xmlns:a="http://schemas.openxmlformats.org/drawingml/2006/main">
               <a:ext uri="{FF2B5EF4-FFF2-40B4-BE49-F238E27FC236}">
-                <a16:creationId xmlns:a16="http://schemas.microsoft.com/office/drawing/2014/main" id="{A14F46D1-ED56-4C6A-864E-E550AF9A83A6}"/>
+                <a16:creationId xmlns:a16="http://schemas.microsoft.com/office/drawing/2014/main" id="{881FCDE3-011D-4DCE-BCF1-3FD25FD47C8C}"/>
               </a:ext>
             </a:extLst>
           </p:cNvPr>
@@ -13632,7 +13832,7 @@
           <p:cNvPr id="13" name="">
             <a:extLst xmlns:a="http://schemas.openxmlformats.org/drawingml/2006/main">
               <a:ext uri="{FF2B5EF4-FFF2-40B4-BE49-F238E27FC236}">
-                <a16:creationId xmlns:a16="http://schemas.microsoft.com/office/drawing/2014/main" id="{9497AEF5-F43B-4E6F-AC59-DC05806BCDF7}"/>
+                <a16:creationId xmlns:a16="http://schemas.microsoft.com/office/drawing/2014/main" id="{4BEF119E-396F-4612-BC4A-6B47D0870C3A}"/>
               </a:ext>
             </a:extLst>
           </p:cNvPr>
@@ -13689,7 +13889,7 @@
           <p:cNvPr id="14" name="">
             <a:extLst xmlns:a="http://schemas.openxmlformats.org/drawingml/2006/main">
               <a:ext uri="{FF2B5EF4-FFF2-40B4-BE49-F238E27FC236}">
-                <a16:creationId xmlns:a16="http://schemas.microsoft.com/office/drawing/2014/main" id="{5B379141-B844-4F29-96F7-02640174D993}"/>
+                <a16:creationId xmlns:a16="http://schemas.microsoft.com/office/drawing/2014/main" id="{338B5449-B978-4E43-A057-5D5A736C4A22}"/>
               </a:ext>
             </a:extLst>
           </p:cNvPr>
@@ -13723,7 +13923,7 @@
           <p:cNvPr id="15" name="">
             <a:extLst xmlns:a="http://schemas.openxmlformats.org/drawingml/2006/main">
               <a:ext uri="{FF2B5EF4-FFF2-40B4-BE49-F238E27FC236}">
-                <a16:creationId xmlns:a16="http://schemas.microsoft.com/office/drawing/2014/main" id="{58C654B8-1C26-468F-AAB4-2E824F4AE0E3}"/>
+                <a16:creationId xmlns:a16="http://schemas.microsoft.com/office/drawing/2014/main" id="{F4B67A09-226D-4652-86CD-9B20DC992BC0}"/>
               </a:ext>
             </a:extLst>
           </p:cNvPr>
@@ -13755,7 +13955,7 @@
           <p:cNvPr id="16" name="">
             <a:extLst xmlns:a="http://schemas.openxmlformats.org/drawingml/2006/main">
               <a:ext uri="{FF2B5EF4-FFF2-40B4-BE49-F238E27FC236}">
-                <a16:creationId xmlns:a16="http://schemas.microsoft.com/office/drawing/2014/main" id="{2D7ACE66-1A44-4914-B1EB-23F5FA41A1A1}"/>
+                <a16:creationId xmlns:a16="http://schemas.microsoft.com/office/drawing/2014/main" id="{4C266E89-358C-4532-991E-A43472A0FBEB}"/>
               </a:ext>
             </a:extLst>
           </p:cNvPr>
@@ -13812,7 +14012,7 @@
           <p:cNvPr id="17" name="">
             <a:extLst xmlns:a="http://schemas.openxmlformats.org/drawingml/2006/main">
               <a:ext uri="{FF2B5EF4-FFF2-40B4-BE49-F238E27FC236}">
-                <a16:creationId xmlns:a16="http://schemas.microsoft.com/office/drawing/2014/main" id="{0FCE17D2-173E-440C-B624-F043B7FB832E}"/>
+                <a16:creationId xmlns:a16="http://schemas.microsoft.com/office/drawing/2014/main" id="{5B463529-2609-4676-98A9-391E0ED694E7}"/>
               </a:ext>
             </a:extLst>
           </p:cNvPr>
@@ -13869,7 +14069,7 @@
           <p:cNvPr id="18" name="">
             <a:extLst xmlns:a="http://schemas.openxmlformats.org/drawingml/2006/main">
               <a:ext uri="{FF2B5EF4-FFF2-40B4-BE49-F238E27FC236}">
-                <a16:creationId xmlns:a16="http://schemas.microsoft.com/office/drawing/2014/main" id="{06D6A3E8-148F-4B5F-A275-CC2775D5B7E4}"/>
+                <a16:creationId xmlns:a16="http://schemas.microsoft.com/office/drawing/2014/main" id="{5EDD3D40-F0A3-421D-8C71-79FB42E2FFF6}"/>
               </a:ext>
             </a:extLst>
           </p:cNvPr>
@@ -13903,7 +14103,7 @@
           <p:cNvPr id="19" name="">
             <a:extLst xmlns:a="http://schemas.openxmlformats.org/drawingml/2006/main">
               <a:ext uri="{FF2B5EF4-FFF2-40B4-BE49-F238E27FC236}">
-                <a16:creationId xmlns:a16="http://schemas.microsoft.com/office/drawing/2014/main" id="{71C91607-113E-41F2-872D-FFBE62C18B84}"/>
+                <a16:creationId xmlns:a16="http://schemas.microsoft.com/office/drawing/2014/main" id="{2433EC4C-C0E8-443E-AB35-E3D70F581B55}"/>
               </a:ext>
             </a:extLst>
           </p:cNvPr>
@@ -13935,7 +14135,7 @@
           <p:cNvPr id="20" name="">
             <a:extLst xmlns:a="http://schemas.openxmlformats.org/drawingml/2006/main">
               <a:ext uri="{FF2B5EF4-FFF2-40B4-BE49-F238E27FC236}">
-                <a16:creationId xmlns:a16="http://schemas.microsoft.com/office/drawing/2014/main" id="{DF14A571-D196-425C-90F9-B57A041351CA}"/>
+                <a16:creationId xmlns:a16="http://schemas.microsoft.com/office/drawing/2014/main" id="{C8E85A34-D94D-45C9-A382-DA2B85F33CB7}"/>
               </a:ext>
             </a:extLst>
           </p:cNvPr>
@@ -13992,7 +14192,7 @@
           <p:cNvPr id="21" name="">
             <a:extLst xmlns:a="http://schemas.openxmlformats.org/drawingml/2006/main">
               <a:ext uri="{FF2B5EF4-FFF2-40B4-BE49-F238E27FC236}">
-                <a16:creationId xmlns:a16="http://schemas.microsoft.com/office/drawing/2014/main" id="{31E20A57-5296-46AE-840B-E3205F71E573}"/>
+                <a16:creationId xmlns:a16="http://schemas.microsoft.com/office/drawing/2014/main" id="{78120C15-FBD0-4A7C-B820-F70B4B5E3772}"/>
               </a:ext>
             </a:extLst>
           </p:cNvPr>
@@ -14047,7 +14247,7 @@
     </p:spTree>
     <p:extLst>
       <p:ext uri="{BB962C8B-B14F-4D97-AF65-F5344CB8AC3E}">
-        <p14:creationId xmlns:p14="http://schemas.microsoft.com/office/powerpoint/2010/main" val="1531581421"/>
+        <p14:creationId xmlns:p14="http://schemas.microsoft.com/office/powerpoint/2010/main" val="1590151693"/>
       </p:ext>
     </p:extLst>
   </p:cSld>
